--- a/presentaciones_html/2026-10-11_presentacion/2026-10-11_presentacion.pptx
+++ b/presentaciones_html/2026-10-11_presentacion/2026-10-11_presentacion.pptx
@@ -3454,9 +3454,33 @@
           </a:prstGeom>
         </p:spPr>
       </p:pic>
-      <p:sp>
-        <p:nvSpPr>
-          <p:cNvPr id="4" name="Rounded Rectangle 3"/>
+      <p:pic>
+        <p:nvPicPr>
+          <p:cNvPr id="4" name="Picture 3" descr="fano_20140914_jesús_nos_conduce_y_lo_ilumina_todo.jpg"/>
+          <p:cNvPicPr>
+            <a:picLocks noChangeAspect="1"/>
+          </p:cNvPicPr>
+          <p:nvPr/>
+        </p:nvPicPr>
+        <p:blipFill>
+          <a:blip r:embed="rId3"/>
+          <a:stretch>
+            <a:fillRect/>
+          </a:stretch>
+        </p:blipFill>
+        <p:spPr>
+          <a:xfrm>
+            <a:off x="6675120" y="1005840"/>
+            <a:ext cx="3410512" cy="2560320"/>
+          </a:xfrm>
+          <a:prstGeom prst="rect">
+            <a:avLst/>
+          </a:prstGeom>
+        </p:spPr>
+      </p:pic>
+      <p:sp>
+        <p:nvSpPr>
+          <p:cNvPr id="5" name="Rounded Rectangle 4"/>
           <p:cNvSpPr/>
           <p:nvPr/>
         </p:nvSpPr>
@@ -3503,7 +3527,7 @@
       </p:sp>
       <p:sp>
         <p:nvSpPr>
-          <p:cNvPr id="5" name="Rectangle 4"/>
+          <p:cNvPr id="6" name="Rectangle 5"/>
           <p:cNvSpPr/>
           <p:nvPr/>
         </p:nvSpPr>
@@ -3546,7 +3570,7 @@
       </p:sp>
       <p:sp>
         <p:nvSpPr>
-          <p:cNvPr id="6" name="TextBox 5"/>
+          <p:cNvPr id="7" name="TextBox 6"/>
           <p:cNvSpPr txBox="1"/>
           <p:nvPr/>
         </p:nvSpPr>
@@ -3570,7 +3594,7 @@
                   <a:srgbClr val="7C3AED"/>
                 </a:solidFill>
               </a:rPr>
-              <a:t>SEGUNDA LECTURA</a:t>
+              <a:t>ALELUYA DE LA TIERRA (1/2)</a:t>
             </a:r>
           </a:p>
           <a:p>
@@ -3584,13 +3608,93 @@
             </a:pPr>
           </a:p>
           <a:p>
-            <a:r>
-              <a:rPr b="1" sz="1500">
-                <a:solidFill>
-                  <a:srgbClr val="D4A76A"/>
-                </a:solidFill>
-              </a:rPr>
-              <a:t>Flp 4,12-14.19-20</a:t>
+            <a:pPr>
+              <a:lnSpc>
+                <a:spcPct val="105000"/>
+              </a:lnSpc>
+            </a:pPr>
+            <a:r>
+              <a:rPr b="0" sz="1900">
+                <a:solidFill>
+                  <a:srgbClr val="37352F"/>
+                </a:solidFill>
+              </a:rPr>
+              <a:t>¿Quién quiere resucitar a este mundo que se muere?_x000D_</a:t>
+            </a:r>
+          </a:p>
+          <a:p>
+            <a:pPr>
+              <a:lnSpc>
+                <a:spcPct val="105000"/>
+              </a:lnSpc>
+            </a:pPr>
+            <a:r>
+              <a:rPr b="0" sz="1900">
+                <a:solidFill>
+                  <a:srgbClr val="37352F"/>
+                </a:solidFill>
+              </a:rPr>
+              <a:t>¿Quién cantará el aleluya de esa nueva luz que viene?_x000D_</a:t>
+            </a:r>
+          </a:p>
+          <a:p>
+            <a:pPr>
+              <a:lnSpc>
+                <a:spcPct val="105000"/>
+              </a:lnSpc>
+            </a:pPr>
+            <a:r>
+              <a:rPr b="0" sz="1900">
+                <a:solidFill>
+                  <a:srgbClr val="37352F"/>
+                </a:solidFill>
+              </a:rPr>
+              <a:t>¿Quién cuando mire la tierra y las tragedias observe,_x000D_</a:t>
+            </a:r>
+          </a:p>
+          <a:p>
+            <a:pPr>
+              <a:lnSpc>
+                <a:spcPct val="105000"/>
+              </a:lnSpc>
+            </a:pPr>
+            <a:r>
+              <a:rPr b="0" sz="1900">
+                <a:solidFill>
+                  <a:srgbClr val="37352F"/>
+                </a:solidFill>
+              </a:rPr>
+              <a:t>sentirá en su corazón el dolor de quien se muere?_x000D_</a:t>
+            </a:r>
+          </a:p>
+          <a:p>
+            <a:pPr>
+              <a:lnSpc>
+                <a:spcPct val="105000"/>
+              </a:lnSpc>
+            </a:pPr>
+            <a:r>
+              <a:rPr b="0" sz="1900">
+                <a:solidFill>
+                  <a:srgbClr val="37352F"/>
+                </a:solidFill>
+              </a:rPr>
+              <a:t>¿Quién es capaz de salvar a este mundo decadente,_x000D_</a:t>
+            </a:r>
+          </a:p>
+          <a:p>
+            <a:pPr>
+              <a:lnSpc>
+                <a:spcPct val="105000"/>
+              </a:lnSpc>
+            </a:pPr>
+            <a:r>
+              <a:rPr b="0" sz="1900">
+                <a:solidFill>
+                  <a:srgbClr val="37352F"/>
+                </a:solidFill>
+              </a:rPr>
+              <a:t>y mantiene la esperanza de los muchos que la pierden?_x000D_</a:t>
             </a:r>
           </a:p>
           <a:p>
@@ -3606,16 +3710,39 @@
           <a:p>
             <a:pPr>
               <a:lnSpc>
-                <a:spcPct val="115000"/>
-              </a:lnSpc>
-            </a:pPr>
-            <a:r>
-              <a:rPr b="0" sz="2000">
-                <a:solidFill>
-                  <a:srgbClr val="37352F"/>
-                </a:solidFill>
-              </a:rPr>
-              <a:t>Sé vivir en pobreza y abundancia. Estoy entrenado para todo y en todo: la hartura y el hambre, la abundancia y la privación. Todo lo puedo en aquel que me conforta. En todo caso, hicisteis bien en compartir mi tribulación. En pago, mi Dios proveerá a todas vuestras necesidades con magnificencia, conforme a su espléndida riqueza en Cristo Jesús. A Dios, nuestro Padre, la gloria por los siglos de los siglos. Amén.</a:t>
+                <a:spcPct val="105000"/>
+              </a:lnSpc>
+            </a:pPr>
+            <a:r>
+              <a:rPr b="1" sz="1900">
+                <a:solidFill>
+                  <a:srgbClr val="37352F"/>
+                </a:solidFill>
+              </a:rPr>
+              <a:t>EL QUE SUFRE, MATA Y MUERE, DESESPERA Y ENLOQUECE,</a:t>
+            </a:r>
+            <a:r>
+              <a:rPr b="0" sz="1900">
+                <a:solidFill>
+                  <a:srgbClr val="37352F"/>
+                </a:solidFill>
+              </a:rPr>
+              <a:t>_x000D_</a:t>
+            </a:r>
+          </a:p>
+          <a:p>
+            <a:pPr>
+              <a:lnSpc>
+                <a:spcPct val="105000"/>
+              </a:lnSpc>
+            </a:pPr>
+            <a:r>
+              <a:rPr b="1" sz="1900">
+                <a:solidFill>
+                  <a:srgbClr val="37352F"/>
+                </a:solidFill>
+              </a:rPr>
+              <a:t>Y OTROS SON ESPECTADORES, NO LO SIENTEN.</a:t>
             </a:r>
           </a:p>
         </p:txBody>
@@ -3713,9 +3840,33 @@
           </a:prstGeom>
         </p:spPr>
       </p:pic>
-      <p:sp>
-        <p:nvSpPr>
-          <p:cNvPr id="4" name="Rounded Rectangle 3"/>
+      <p:pic>
+        <p:nvPicPr>
+          <p:cNvPr id="4" name="Picture 3" descr="fano_20140914_jesús_nos_conduce_y_lo_ilumina_todo.jpg"/>
+          <p:cNvPicPr>
+            <a:picLocks noChangeAspect="1"/>
+          </p:cNvPicPr>
+          <p:nvPr/>
+        </p:nvPicPr>
+        <p:blipFill>
+          <a:blip r:embed="rId3"/>
+          <a:stretch>
+            <a:fillRect/>
+          </a:stretch>
+        </p:blipFill>
+        <p:spPr>
+          <a:xfrm>
+            <a:off x="6675120" y="1005840"/>
+            <a:ext cx="3410512" cy="2560320"/>
+          </a:xfrm>
+          <a:prstGeom prst="rect">
+            <a:avLst/>
+          </a:prstGeom>
+        </p:spPr>
+      </p:pic>
+      <p:sp>
+        <p:nvSpPr>
+          <p:cNvPr id="5" name="Rounded Rectangle 4"/>
           <p:cNvSpPr/>
           <p:nvPr/>
         </p:nvSpPr>
@@ -3762,7 +3913,7 @@
       </p:sp>
       <p:sp>
         <p:nvSpPr>
-          <p:cNvPr id="5" name="Rectangle 4"/>
+          <p:cNvPr id="6" name="Rectangle 5"/>
           <p:cNvSpPr/>
           <p:nvPr/>
         </p:nvSpPr>
@@ -3805,7 +3956,7 @@
       </p:sp>
       <p:sp>
         <p:nvSpPr>
-          <p:cNvPr id="6" name="TextBox 5"/>
+          <p:cNvPr id="7" name="TextBox 6"/>
           <p:cNvSpPr txBox="1"/>
           <p:nvPr/>
         </p:nvSpPr>
@@ -3829,7 +3980,7 @@
                   <a:srgbClr val="7C3AED"/>
                 </a:solidFill>
               </a:rPr>
-              <a:t>ALE, ALELUYA</a:t>
+              <a:t>ALELUYA DE LA TIERRA (2/2)</a:t>
             </a:r>
           </a:p>
           <a:p>
@@ -3854,112 +4005,122 @@
                   <a:srgbClr val="37352F"/>
                 </a:solidFill>
               </a:rPr>
-              <a:t>Ale, aleluya,</a:t>
-            </a:r>
-          </a:p>
-          <a:p>
-            <a:pPr>
-              <a:lnSpc>
-                <a:spcPct val="105000"/>
-              </a:lnSpc>
-            </a:pPr>
-            <a:r>
-              <a:rPr b="0" sz="1900">
-                <a:solidFill>
-                  <a:srgbClr val="37352F"/>
-                </a:solidFill>
-              </a:rPr>
-              <a:t>aleluya, aleluya,</a:t>
-            </a:r>
-          </a:p>
-          <a:p>
-            <a:pPr>
-              <a:lnSpc>
-                <a:spcPct val="105000"/>
-              </a:lnSpc>
-            </a:pPr>
-            <a:r>
-              <a:rPr b="0" sz="1900">
-                <a:solidFill>
-                  <a:srgbClr val="37352F"/>
-                </a:solidFill>
-              </a:rPr>
-              <a:t>aleluya, aleluya,</a:t>
-            </a:r>
-          </a:p>
-          <a:p>
-            <a:pPr>
-              <a:lnSpc>
-                <a:spcPct val="105000"/>
-              </a:lnSpc>
-            </a:pPr>
-            <a:r>
-              <a:rPr b="0" sz="1900">
-                <a:solidFill>
-                  <a:srgbClr val="37352F"/>
-                </a:solidFill>
-              </a:rPr>
-              <a:t>aleluya, aleluya.</a:t>
-            </a:r>
-          </a:p>
-          <a:p>
-            <a:pPr>
-              <a:lnSpc>
-                <a:spcPct val="105000"/>
-              </a:lnSpc>
-            </a:pPr>
-            <a:r>
-              <a:rPr b="0" sz="1900">
-                <a:solidFill>
-                  <a:srgbClr val="37352F"/>
-                </a:solidFill>
-              </a:rPr>
-              <a:t>Pasarán los cielos,</a:t>
-            </a:r>
-          </a:p>
-          <a:p>
-            <a:pPr>
-              <a:lnSpc>
-                <a:spcPct val="105000"/>
-              </a:lnSpc>
-            </a:pPr>
-            <a:r>
-              <a:rPr b="0" sz="1900">
-                <a:solidFill>
-                  <a:srgbClr val="37352F"/>
-                </a:solidFill>
-              </a:rPr>
-              <a:t>pasará la tierra,</a:t>
-            </a:r>
-          </a:p>
-          <a:p>
-            <a:pPr>
-              <a:lnSpc>
-                <a:spcPct val="105000"/>
-              </a:lnSpc>
-            </a:pPr>
-            <a:r>
-              <a:rPr b="0" sz="1900">
-                <a:solidFill>
-                  <a:srgbClr val="37352F"/>
-                </a:solidFill>
-              </a:rPr>
-              <a:t>mas tus palabras no pasarán.</a:t>
-            </a:r>
-          </a:p>
-          <a:p>
-            <a:pPr>
-              <a:lnSpc>
-                <a:spcPct val="105000"/>
-              </a:lnSpc>
-            </a:pPr>
-            <a:r>
-              <a:rPr b="0" sz="1900">
-                <a:solidFill>
-                  <a:srgbClr val="37352F"/>
-                </a:solidFill>
-              </a:rPr>
-              <a:t>Aleluya, aleluya.</a:t>
+              <a:t>¿Quién bajará de la cruz a tanto cristo sufriente,_x000D_</a:t>
+            </a:r>
+          </a:p>
+          <a:p>
+            <a:pPr>
+              <a:lnSpc>
+                <a:spcPct val="105000"/>
+              </a:lnSpc>
+            </a:pPr>
+            <a:r>
+              <a:rPr b="0" sz="1900">
+                <a:solidFill>
+                  <a:srgbClr val="37352F"/>
+                </a:solidFill>
+              </a:rPr>
+              <a:t>mientras los hombres miramos, impasivos e indolentes?_x000D_</a:t>
+            </a:r>
+          </a:p>
+          <a:p>
+            <a:pPr>
+              <a:lnSpc>
+                <a:spcPct val="105000"/>
+              </a:lnSpc>
+            </a:pPr>
+            <a:r>
+              <a:rPr b="0" sz="1900">
+                <a:solidFill>
+                  <a:srgbClr val="37352F"/>
+                </a:solidFill>
+              </a:rPr>
+              <a:t>¿Quién grita desde el silencio de un ser que a su Dios retiene,_x000D_</a:t>
+            </a:r>
+          </a:p>
+          <a:p>
+            <a:pPr>
+              <a:lnSpc>
+                <a:spcPct val="105000"/>
+              </a:lnSpc>
+            </a:pPr>
+            <a:r>
+              <a:rPr b="0" sz="1900">
+                <a:solidFill>
+                  <a:srgbClr val="37352F"/>
+                </a:solidFill>
+              </a:rPr>
+              <a:t>porque se hace palabra que sin hablar se la entiende?_x000D_</a:t>
+            </a:r>
+          </a:p>
+          <a:p>
+            <a:pPr>
+              <a:lnSpc>
+                <a:spcPct val="105000"/>
+              </a:lnSpc>
+            </a:pPr>
+            <a:r>
+              <a:rPr b="0" sz="1900">
+                <a:solidFill>
+                  <a:srgbClr val="37352F"/>
+                </a:solidFill>
+              </a:rPr>
+              <a:t>¿Quién se torna en aleluya porque traduce la muerte,_x000D_</a:t>
+            </a:r>
+          </a:p>
+          <a:p>
+            <a:pPr>
+              <a:lnSpc>
+                <a:spcPct val="105000"/>
+              </a:lnSpc>
+            </a:pPr>
+            <a:r>
+              <a:rPr b="0" sz="1900">
+                <a:solidFill>
+                  <a:srgbClr val="37352F"/>
+                </a:solidFill>
+              </a:rPr>
+              <a:t>como el trigo que se pudre y de uno cientos vienen?_x000D_</a:t>
+            </a:r>
+          </a:p>
+          <a:p>
+            <a:pPr>
+              <a:spcBef>
+                <a:spcPts val="0"/>
+              </a:spcBef>
+              <a:spcAft>
+                <a:spcPts val="0"/>
+              </a:spcAft>
+            </a:pPr>
+          </a:p>
+          <a:p>
+            <a:pPr>
+              <a:lnSpc>
+                <a:spcPct val="105000"/>
+              </a:lnSpc>
+            </a:pPr>
+            <a:r>
+              <a:rPr b="0" sz="1900">
+                <a:solidFill>
+                  <a:srgbClr val="37352F"/>
+                </a:solidFill>
+              </a:rPr>
+              <a:t>**¡ALELUYA! CANTARÁ, QUIEN PERDIÓ LA ESPERANZA,_x000D_</a:t>
+            </a:r>
+          </a:p>
+          <a:p>
+            <a:pPr>
+              <a:lnSpc>
+                <a:spcPct val="105000"/>
+              </a:lnSpc>
+            </a:pPr>
+            <a:r>
+              <a:rPr b="0" sz="1900">
+                <a:solidFill>
+                  <a:srgbClr val="37352F"/>
+                </a:solidFill>
+              </a:rPr>
+              <a:t>Y LA TIERRA SONREIRÁ. ¡ALELUYA!**</a:t>
             </a:r>
           </a:p>
         </p:txBody>
@@ -5270,9 +5431,33 @@
           </a:prstGeom>
         </p:spPr>
       </p:pic>
-      <p:sp>
-        <p:nvSpPr>
-          <p:cNvPr id="4" name="Rounded Rectangle 3"/>
+      <p:pic>
+        <p:nvPicPr>
+          <p:cNvPr id="4" name="Picture 3" descr="fano_20140880_dadles_vosotros_de_comer.jpg"/>
+          <p:cNvPicPr>
+            <a:picLocks noChangeAspect="1"/>
+          </p:cNvPicPr>
+          <p:nvPr/>
+        </p:nvPicPr>
+        <p:blipFill>
+          <a:blip r:embed="rId3"/>
+          <a:stretch>
+            <a:fillRect/>
+          </a:stretch>
+        </p:blipFill>
+        <p:spPr>
+          <a:xfrm>
+            <a:off x="6675120" y="1005840"/>
+            <a:ext cx="3213791" cy="2560320"/>
+          </a:xfrm>
+          <a:prstGeom prst="rect">
+            <a:avLst/>
+          </a:prstGeom>
+        </p:spPr>
+      </p:pic>
+      <p:sp>
+        <p:nvSpPr>
+          <p:cNvPr id="5" name="Rounded Rectangle 4"/>
           <p:cNvSpPr/>
           <p:nvPr/>
         </p:nvSpPr>
@@ -5319,7 +5504,7 @@
       </p:sp>
       <p:sp>
         <p:nvSpPr>
-          <p:cNvPr id="5" name="Rectangle 4"/>
+          <p:cNvPr id="6" name="Rectangle 5"/>
           <p:cNvSpPr/>
           <p:nvPr/>
         </p:nvSpPr>
@@ -5362,7 +5547,7 @@
       </p:sp>
       <p:sp>
         <p:nvSpPr>
-          <p:cNvPr id="6" name="TextBox 5"/>
+          <p:cNvPr id="7" name="TextBox 6"/>
           <p:cNvSpPr txBox="1"/>
           <p:nvPr/>
         </p:nvSpPr>
@@ -5386,7 +5571,7 @@
                   <a:srgbClr val="7C3AED"/>
                 </a:solidFill>
               </a:rPr>
-              <a:t>HOY COMO AYER</a:t>
+              <a:t>TOMA MI VIDA</a:t>
             </a:r>
           </a:p>
           <a:p>
@@ -5411,262 +5596,947 @@
                   <a:srgbClr val="37352F"/>
                 </a:solidFill>
               </a:rPr>
-              <a:t>HOY COMO AYER</a:t>
-            </a:r>
-          </a:p>
-          <a:p>
-            <a:pPr>
-              <a:lnSpc>
-                <a:spcPct val="105000"/>
-              </a:lnSpc>
-            </a:pPr>
-            <a:r>
-              <a:rPr b="0" sz="1900">
-                <a:solidFill>
-                  <a:srgbClr val="37352F"/>
-                </a:solidFill>
-              </a:rPr>
-              <a:t>Hoy como ayer calla quien no tiene voz,</a:t>
-            </a:r>
-          </a:p>
-          <a:p>
-            <a:pPr>
-              <a:lnSpc>
-                <a:spcPct val="105000"/>
-              </a:lnSpc>
-            </a:pPr>
-            <a:r>
-              <a:rPr b="0" sz="1900">
-                <a:solidFill>
-                  <a:srgbClr val="37352F"/>
-                </a:solidFill>
-              </a:rPr>
-              <a:t>aquél a quien nadie enseñó a decir su palabra.</a:t>
-            </a:r>
-          </a:p>
-          <a:p>
-            <a:pPr>
-              <a:lnSpc>
-                <a:spcPct val="105000"/>
-              </a:lnSpc>
-            </a:pPr>
-            <a:r>
-              <a:rPr b="0" sz="1900">
-                <a:solidFill>
-                  <a:srgbClr val="37352F"/>
-                </a:solidFill>
-              </a:rPr>
-              <a:t>Hoy como ayer quien sabe podrá dominar</a:t>
-            </a:r>
-          </a:p>
-          <a:p>
-            <a:pPr>
-              <a:lnSpc>
-                <a:spcPct val="105000"/>
-              </a:lnSpc>
-            </a:pPr>
-            <a:r>
-              <a:rPr b="0" sz="1900">
-                <a:solidFill>
-                  <a:srgbClr val="37352F"/>
-                </a:solidFill>
-              </a:rPr>
-              <a:t>y el pobre tendrá que bajar otra vez la mirada.</a:t>
-            </a:r>
-          </a:p>
-          <a:p>
-            <a:pPr>
-              <a:lnSpc>
-                <a:spcPct val="105000"/>
-              </a:lnSpc>
-            </a:pPr>
-            <a:r>
-              <a:rPr b="0" sz="1900">
-                <a:solidFill>
-                  <a:srgbClr val="37352F"/>
-                </a:solidFill>
-              </a:rPr>
-              <a:t>CORO</a:t>
-            </a:r>
-          </a:p>
-          <a:p>
-            <a:pPr>
-              <a:lnSpc>
-                <a:spcPct val="105000"/>
-              </a:lnSpc>
-            </a:pPr>
-            <a:r>
-              <a:rPr b="0" sz="1900">
-                <a:solidFill>
-                  <a:srgbClr val="37352F"/>
-                </a:solidFill>
-              </a:rPr>
-              <a:t>Calasanz nos enseñó como hacer realidad</a:t>
-            </a:r>
-          </a:p>
-          <a:p>
-            <a:pPr>
-              <a:lnSpc>
-                <a:spcPct val="105000"/>
-              </a:lnSpc>
-            </a:pPr>
-            <a:r>
-              <a:rPr b="0" sz="1900">
-                <a:solidFill>
-                  <a:srgbClr val="37352F"/>
-                </a:solidFill>
-              </a:rPr>
-              <a:t>un mañana de esperanza, una nueva humanidad</a:t>
-            </a:r>
-          </a:p>
-          <a:p>
-            <a:pPr>
-              <a:lnSpc>
-                <a:spcPct val="105000"/>
-              </a:lnSpc>
-            </a:pPr>
-            <a:r>
-              <a:rPr b="0" sz="1900">
-                <a:solidFill>
-                  <a:srgbClr val="37352F"/>
-                </a:solidFill>
-              </a:rPr>
-              <a:t>despertando la razón, la conciencia y dignidad,</a:t>
-            </a:r>
-          </a:p>
-          <a:p>
-            <a:pPr>
-              <a:lnSpc>
-                <a:spcPct val="105000"/>
-              </a:lnSpc>
-            </a:pPr>
-            <a:r>
-              <a:rPr b="0" sz="1900">
-                <a:solidFill>
-                  <a:srgbClr val="37352F"/>
-                </a:solidFill>
-              </a:rPr>
-              <a:t>educando al hombre nuevo en amor y libertad.</a:t>
-            </a:r>
-          </a:p>
-          <a:p>
-            <a:pPr>
-              <a:lnSpc>
-                <a:spcPct val="105000"/>
-              </a:lnSpc>
-            </a:pPr>
-            <a:r>
-              <a:rPr b="0" sz="1900">
-                <a:solidFill>
-                  <a:srgbClr val="37352F"/>
-                </a:solidFill>
-              </a:rPr>
-              <a:t>Calasanz nos enseñó como hacer realidad</a:t>
-            </a:r>
-          </a:p>
-          <a:p>
-            <a:pPr>
-              <a:lnSpc>
-                <a:spcPct val="105000"/>
-              </a:lnSpc>
-            </a:pPr>
-            <a:r>
-              <a:rPr b="0" sz="1900">
-                <a:solidFill>
-                  <a:srgbClr val="37352F"/>
-                </a:solidFill>
-              </a:rPr>
-              <a:t>un mañana de esperanza, una nueva humanidad</a:t>
-            </a:r>
-          </a:p>
-          <a:p>
-            <a:pPr>
-              <a:lnSpc>
-                <a:spcPct val="105000"/>
-              </a:lnSpc>
-            </a:pPr>
-            <a:r>
-              <a:rPr b="0" sz="1900">
-                <a:solidFill>
-                  <a:srgbClr val="37352F"/>
-                </a:solidFill>
-              </a:rPr>
-              <a:t>ayudando a descubrir que Jesús de Nazaret</a:t>
-            </a:r>
-          </a:p>
-          <a:p>
-            <a:pPr>
-              <a:lnSpc>
-                <a:spcPct val="105000"/>
-              </a:lnSpc>
-            </a:pPr>
-            <a:r>
-              <a:rPr b="0" sz="1900">
-                <a:solidFill>
-                  <a:srgbClr val="37352F"/>
-                </a:solidFill>
-              </a:rPr>
-              <a:t>sigue vivo y su camino juntos hay que recorrer.</a:t>
-            </a:r>
-          </a:p>
-          <a:p>
-            <a:pPr>
-              <a:lnSpc>
-                <a:spcPct val="105000"/>
-              </a:lnSpc>
-            </a:pPr>
-            <a:r>
-              <a:rPr b="0" sz="1900">
-                <a:solidFill>
-                  <a:srgbClr val="37352F"/>
-                </a:solidFill>
-              </a:rPr>
-              <a:t>Mira y verás que hay niños que nunca sabrán</a:t>
-            </a:r>
-          </a:p>
-          <a:p>
-            <a:pPr>
-              <a:lnSpc>
-                <a:spcPct val="105000"/>
-              </a:lnSpc>
-            </a:pPr>
-            <a:r>
-              <a:rPr b="0" sz="1900">
-                <a:solidFill>
-                  <a:srgbClr val="37352F"/>
-                </a:solidFill>
-              </a:rPr>
-              <a:t>que tienen derecho a reír y a jugar en la plaza.</a:t>
-            </a:r>
-          </a:p>
-          <a:p>
-            <a:pPr>
-              <a:lnSpc>
-                <a:spcPct val="105000"/>
-              </a:lnSpc>
-            </a:pPr>
-            <a:r>
-              <a:rPr b="0" sz="1900">
-                <a:solidFill>
-                  <a:srgbClr val="37352F"/>
-                </a:solidFill>
-              </a:rPr>
-              <a:t>Mira y verás que muchos explotan sin fin</a:t>
-            </a:r>
-          </a:p>
-          <a:p>
-            <a:pPr>
-              <a:lnSpc>
-                <a:spcPct val="105000"/>
-              </a:lnSpc>
-            </a:pPr>
-            <a:r>
-              <a:rPr b="0" sz="1900">
-                <a:solidFill>
-                  <a:srgbClr val="37352F"/>
-                </a:solidFill>
-              </a:rPr>
-              <a:t>la fuerza de la juventud para hacer su ganancia</a:t>
+              <a:t>Do Fa Do Fa</a:t>
+            </a:r>
+          </a:p>
+          <a:p>
+            <a:pPr>
+              <a:spcBef>
+                <a:spcPts val="0"/>
+              </a:spcBef>
+              <a:spcAft>
+                <a:spcPts val="0"/>
+              </a:spcAft>
+            </a:pPr>
+          </a:p>
+          <a:p>
+            <a:pPr>
+              <a:lnSpc>
+                <a:spcPct val="105000"/>
+              </a:lnSpc>
+            </a:pPr>
+            <a:r>
+              <a:rPr b="0" sz="1900">
+                <a:solidFill>
+                  <a:srgbClr val="37352F"/>
+                </a:solidFill>
+              </a:rPr>
+              <a:t>Esto que te doy es vino y pan</a:t>
+            </a:r>
+          </a:p>
+          <a:p>
+            <a:pPr>
+              <a:lnSpc>
+                <a:spcPct val="105000"/>
+              </a:lnSpc>
+            </a:pPr>
+            <a:r>
+              <a:rPr b="0" sz="1900">
+                <a:solidFill>
+                  <a:srgbClr val="37352F"/>
+                </a:solidFill>
+              </a:rPr>
+              <a:t>señor.</a:t>
+            </a:r>
+          </a:p>
+          <a:p>
+            <a:pPr>
+              <a:spcBef>
+                <a:spcPts val="0"/>
+              </a:spcBef>
+              <a:spcAft>
+                <a:spcPts val="0"/>
+              </a:spcAft>
+            </a:pPr>
+          </a:p>
+          <a:p>
+            <a:pPr>
+              <a:lnSpc>
+                <a:spcPct val="105000"/>
+              </a:lnSpc>
+            </a:pPr>
+            <a:r>
+              <a:rPr b="0" sz="1900">
+                <a:solidFill>
+                  <a:srgbClr val="37352F"/>
+                </a:solidFill>
+              </a:rPr>
+              <a:t>Do Sol Fa</a:t>
+            </a:r>
+          </a:p>
+          <a:p>
+            <a:pPr>
+              <a:spcBef>
+                <a:spcPts val="0"/>
+              </a:spcBef>
+              <a:spcAft>
+                <a:spcPts val="0"/>
+              </a:spcAft>
+            </a:pPr>
+          </a:p>
+          <a:p>
+            <a:pPr>
+              <a:lnSpc>
+                <a:spcPct val="105000"/>
+              </a:lnSpc>
+            </a:pPr>
+            <a:r>
+              <a:rPr b="0" sz="1900">
+                <a:solidFill>
+                  <a:srgbClr val="37352F"/>
+                </a:solidFill>
+              </a:rPr>
+              <a:t>Esto que te doy</a:t>
+            </a:r>
+          </a:p>
+          <a:p>
+            <a:pPr>
+              <a:lnSpc>
+                <a:spcPct val="105000"/>
+              </a:lnSpc>
+            </a:pPr>
+            <a:r>
+              <a:rPr b="0" sz="1900">
+                <a:solidFill>
+                  <a:srgbClr val="37352F"/>
+                </a:solidFill>
+              </a:rPr>
+              <a:t>es mi trabajo.</a:t>
+            </a:r>
+          </a:p>
+          <a:p>
+            <a:pPr>
+              <a:spcBef>
+                <a:spcPts val="0"/>
+              </a:spcBef>
+              <a:spcAft>
+                <a:spcPts val="0"/>
+              </a:spcAft>
+            </a:pPr>
+          </a:p>
+          <a:p>
+            <a:pPr>
+              <a:lnSpc>
+                <a:spcPct val="105000"/>
+              </a:lnSpc>
+            </a:pPr>
+            <a:r>
+              <a:rPr b="0" sz="1900">
+                <a:solidFill>
+                  <a:srgbClr val="37352F"/>
+                </a:solidFill>
+              </a:rPr>
+              <a:t>Sol Do</a:t>
+            </a:r>
+          </a:p>
+          <a:p>
+            <a:pPr>
+              <a:spcBef>
+                <a:spcPts val="0"/>
+              </a:spcBef>
+              <a:spcAft>
+                <a:spcPts val="0"/>
+              </a:spcAft>
+            </a:pPr>
+          </a:p>
+          <a:p>
+            <a:pPr>
+              <a:lnSpc>
+                <a:spcPct val="105000"/>
+              </a:lnSpc>
+            </a:pPr>
+            <a:r>
+              <a:rPr b="0" sz="1900">
+                <a:solidFill>
+                  <a:srgbClr val="37352F"/>
+                </a:solidFill>
+              </a:rPr>
+              <a:t>Es mi corazón, es</a:t>
+            </a:r>
+          </a:p>
+          <a:p>
+            <a:pPr>
+              <a:lnSpc>
+                <a:spcPct val="105000"/>
+              </a:lnSpc>
+            </a:pPr>
+            <a:r>
+              <a:rPr b="0" sz="1900">
+                <a:solidFill>
+                  <a:srgbClr val="37352F"/>
+                </a:solidFill>
+              </a:rPr>
+              <a:t>mi alma,</a:t>
+            </a:r>
+          </a:p>
+          <a:p>
+            <a:pPr>
+              <a:spcBef>
+                <a:spcPts val="0"/>
+              </a:spcBef>
+              <a:spcAft>
+                <a:spcPts val="0"/>
+              </a:spcAft>
+            </a:pPr>
+          </a:p>
+          <a:p>
+            <a:pPr>
+              <a:lnSpc>
+                <a:spcPct val="105000"/>
+              </a:lnSpc>
+            </a:pPr>
+            <a:r>
+              <a:rPr b="0" sz="1900">
+                <a:solidFill>
+                  <a:srgbClr val="37352F"/>
+                </a:solidFill>
+              </a:rPr>
+              <a:t>Mim Lam Rem</a:t>
+            </a:r>
+          </a:p>
+          <a:p>
+            <a:pPr>
+              <a:spcBef>
+                <a:spcPts val="0"/>
+              </a:spcBef>
+              <a:spcAft>
+                <a:spcPts val="0"/>
+              </a:spcAft>
+            </a:pPr>
+          </a:p>
+          <a:p>
+            <a:pPr>
+              <a:lnSpc>
+                <a:spcPct val="105000"/>
+              </a:lnSpc>
+            </a:pPr>
+            <a:r>
+              <a:rPr b="0" sz="1900">
+                <a:solidFill>
+                  <a:srgbClr val="37352F"/>
+                </a:solidFill>
+              </a:rPr>
+              <a:t>es mi cuerpo</a:t>
+            </a:r>
+          </a:p>
+          <a:p>
+            <a:pPr>
+              <a:lnSpc>
+                <a:spcPct val="105000"/>
+              </a:lnSpc>
+            </a:pPr>
+            <a:r>
+              <a:rPr b="0" sz="1900">
+                <a:solidFill>
+                  <a:srgbClr val="37352F"/>
+                </a:solidFill>
+              </a:rPr>
+              <a:t>y mi razón,</a:t>
+            </a:r>
+          </a:p>
+          <a:p>
+            <a:pPr>
+              <a:spcBef>
+                <a:spcPts val="0"/>
+              </a:spcBef>
+              <a:spcAft>
+                <a:spcPts val="0"/>
+              </a:spcAft>
+            </a:pPr>
+          </a:p>
+          <a:p>
+            <a:pPr>
+              <a:lnSpc>
+                <a:spcPct val="105000"/>
+              </a:lnSpc>
+            </a:pPr>
+            <a:r>
+              <a:rPr b="0" sz="1900">
+                <a:solidFill>
+                  <a:srgbClr val="37352F"/>
+                </a:solidFill>
+              </a:rPr>
+              <a:t>Sol Do Sol7</a:t>
+            </a:r>
+          </a:p>
+          <a:p>
+            <a:pPr>
+              <a:spcBef>
+                <a:spcPts val="0"/>
+              </a:spcBef>
+              <a:spcAft>
+                <a:spcPts val="0"/>
+              </a:spcAft>
+            </a:pPr>
+          </a:p>
+          <a:p>
+            <a:pPr>
+              <a:lnSpc>
+                <a:spcPct val="105000"/>
+              </a:lnSpc>
+            </a:pPr>
+            <a:r>
+              <a:rPr b="0" sz="1900">
+                <a:solidFill>
+                  <a:srgbClr val="37352F"/>
+                </a:solidFill>
+              </a:rPr>
+              <a:t>el esfuerzo</a:t>
+            </a:r>
+          </a:p>
+          <a:p>
+            <a:pPr>
+              <a:lnSpc>
+                <a:spcPct val="105000"/>
+              </a:lnSpc>
+            </a:pPr>
+            <a:r>
+              <a:rPr b="0" sz="1900">
+                <a:solidFill>
+                  <a:srgbClr val="37352F"/>
+                </a:solidFill>
+              </a:rPr>
+              <a:t>de mi caminar...</a:t>
+            </a:r>
+          </a:p>
+          <a:p>
+            <a:pPr>
+              <a:spcBef>
+                <a:spcPts val="0"/>
+              </a:spcBef>
+              <a:spcAft>
+                <a:spcPts val="0"/>
+              </a:spcAft>
+            </a:pPr>
+          </a:p>
+          <a:p>
+            <a:pPr>
+              <a:lnSpc>
+                <a:spcPct val="105000"/>
+              </a:lnSpc>
+            </a:pPr>
+            <a:r>
+              <a:rPr b="0" sz="1900">
+                <a:solidFill>
+                  <a:srgbClr val="37352F"/>
+                </a:solidFill>
+              </a:rPr>
+              <a:t>Esto que te doy mi vida es</a:t>
+            </a:r>
+          </a:p>
+          <a:p>
+            <a:pPr>
+              <a:lnSpc>
+                <a:spcPct val="105000"/>
+              </a:lnSpc>
+            </a:pPr>
+            <a:r>
+              <a:rPr b="0" sz="1900">
+                <a:solidFill>
+                  <a:srgbClr val="37352F"/>
+                </a:solidFill>
+              </a:rPr>
+              <a:t>señor.</a:t>
+            </a:r>
+          </a:p>
+          <a:p>
+            <a:pPr>
+              <a:spcBef>
+                <a:spcPts val="0"/>
+              </a:spcBef>
+              <a:spcAft>
+                <a:spcPts val="0"/>
+              </a:spcAft>
+            </a:pPr>
+          </a:p>
+          <a:p>
+            <a:pPr>
+              <a:lnSpc>
+                <a:spcPct val="105000"/>
+              </a:lnSpc>
+            </a:pPr>
+            <a:r>
+              <a:rPr b="0" sz="1900">
+                <a:solidFill>
+                  <a:srgbClr val="37352F"/>
+                </a:solidFill>
+              </a:rPr>
+              <a:t>es mi amor también es mi dolor.</a:t>
+            </a:r>
+          </a:p>
+          <a:p>
+            <a:pPr>
+              <a:spcBef>
+                <a:spcPts val="0"/>
+              </a:spcBef>
+              <a:spcAft>
+                <a:spcPts val="0"/>
+              </a:spcAft>
+            </a:pPr>
+          </a:p>
+          <a:p>
+            <a:pPr>
+              <a:lnSpc>
+                <a:spcPct val="105000"/>
+              </a:lnSpc>
+            </a:pPr>
+            <a:r>
+              <a:rPr b="0" sz="1900">
+                <a:solidFill>
+                  <a:srgbClr val="37352F"/>
+                </a:solidFill>
+              </a:rPr>
+              <a:t>Es la ilusión de mis sueños,</a:t>
+            </a:r>
+          </a:p>
+          <a:p>
+            <a:pPr>
+              <a:spcBef>
+                <a:spcPts val="0"/>
+              </a:spcBef>
+              <a:spcAft>
+                <a:spcPts val="0"/>
+              </a:spcAft>
+            </a:pPr>
+          </a:p>
+          <a:p>
+            <a:pPr>
+              <a:lnSpc>
+                <a:spcPct val="105000"/>
+              </a:lnSpc>
+            </a:pPr>
+            <a:r>
+              <a:rPr b="0" sz="1900">
+                <a:solidFill>
+                  <a:srgbClr val="37352F"/>
+                </a:solidFill>
+              </a:rPr>
+              <a:t>es mi gozo y mi llorar,</a:t>
+            </a:r>
+          </a:p>
+          <a:p>
+            <a:pPr>
+              <a:spcBef>
+                <a:spcPts val="0"/>
+              </a:spcBef>
+              <a:spcAft>
+                <a:spcPts val="0"/>
+              </a:spcAft>
+            </a:pPr>
+          </a:p>
+          <a:p>
+            <a:pPr>
+              <a:lnSpc>
+                <a:spcPct val="105000"/>
+              </a:lnSpc>
+            </a:pPr>
+            <a:r>
+              <a:rPr b="0" sz="1900">
+                <a:solidFill>
+                  <a:srgbClr val="37352F"/>
+                </a:solidFill>
+              </a:rPr>
+              <a:t>es mi canto</a:t>
+            </a:r>
+          </a:p>
+          <a:p>
+            <a:pPr>
+              <a:lnSpc>
+                <a:spcPct val="105000"/>
+              </a:lnSpc>
+            </a:pPr>
+            <a:r>
+              <a:rPr b="0" sz="1900">
+                <a:solidFill>
+                  <a:srgbClr val="37352F"/>
+                </a:solidFill>
+              </a:rPr>
+              <a:t>y mi oración.</a:t>
+            </a:r>
+          </a:p>
+          <a:p>
+            <a:pPr>
+              <a:spcBef>
+                <a:spcPts val="0"/>
+              </a:spcBef>
+              <a:spcAft>
+                <a:spcPts val="0"/>
+              </a:spcAft>
+            </a:pPr>
+          </a:p>
+          <a:p>
+            <a:pPr>
+              <a:lnSpc>
+                <a:spcPct val="105000"/>
+              </a:lnSpc>
+            </a:pPr>
+            <a:r>
+              <a:rPr b="0" sz="1900">
+                <a:solidFill>
+                  <a:srgbClr val="37352F"/>
+                </a:solidFill>
+              </a:rPr>
+              <a:t>Do</a:t>
+            </a:r>
+          </a:p>
+          <a:p>
+            <a:pPr>
+              <a:lnSpc>
+                <a:spcPct val="105000"/>
+              </a:lnSpc>
+            </a:pPr>
+            <a:r>
+              <a:rPr b="0" sz="1900">
+                <a:solidFill>
+                  <a:srgbClr val="37352F"/>
+                </a:solidFill>
+              </a:rPr>
+              <a:t>Mim Lam Fa Sol</a:t>
+            </a:r>
+          </a:p>
+          <a:p>
+            <a:pPr>
+              <a:spcBef>
+                <a:spcPts val="0"/>
+              </a:spcBef>
+              <a:spcAft>
+                <a:spcPts val="0"/>
+              </a:spcAft>
+            </a:pPr>
+          </a:p>
+          <a:p>
+            <a:pPr>
+              <a:lnSpc>
+                <a:spcPct val="105000"/>
+              </a:lnSpc>
+            </a:pPr>
+            <a:r>
+              <a:rPr b="0" sz="1900">
+                <a:solidFill>
+                  <a:srgbClr val="37352F"/>
+                </a:solidFill>
+              </a:rPr>
+              <a:t>TOMA MI VIDA, PONLA EN TU CORAZÓN.</a:t>
+            </a:r>
+          </a:p>
+          <a:p>
+            <a:pPr>
+              <a:spcBef>
+                <a:spcPts val="0"/>
+              </a:spcBef>
+              <a:spcAft>
+                <a:spcPts val="0"/>
+              </a:spcAft>
+            </a:pPr>
+          </a:p>
+          <a:p>
+            <a:pPr>
+              <a:lnSpc>
+                <a:spcPct val="105000"/>
+              </a:lnSpc>
+            </a:pPr>
+            <a:r>
+              <a:rPr b="0" sz="1900">
+                <a:solidFill>
+                  <a:srgbClr val="37352F"/>
+                </a:solidFill>
+              </a:rPr>
+              <a:t>Do Mim</a:t>
+            </a:r>
+          </a:p>
+          <a:p>
+            <a:pPr>
+              <a:lnSpc>
+                <a:spcPct val="105000"/>
+              </a:lnSpc>
+            </a:pPr>
+            <a:r>
+              <a:rPr b="0" sz="1900">
+                <a:solidFill>
+                  <a:srgbClr val="37352F"/>
+                </a:solidFill>
+              </a:rPr>
+              <a:t>Lam Fa Sol</a:t>
+            </a:r>
+          </a:p>
+          <a:p>
+            <a:pPr>
+              <a:spcBef>
+                <a:spcPts val="0"/>
+              </a:spcBef>
+              <a:spcAft>
+                <a:spcPts val="0"/>
+              </a:spcAft>
+            </a:pPr>
+          </a:p>
+          <a:p>
+            <a:pPr>
+              <a:lnSpc>
+                <a:spcPct val="105000"/>
+              </a:lnSpc>
+            </a:pPr>
+            <a:r>
+              <a:rPr b="0" sz="1900">
+                <a:solidFill>
+                  <a:srgbClr val="37352F"/>
+                </a:solidFill>
+              </a:rPr>
+              <a:t>DAME TU MANO Y LLÉVAME.</a:t>
+            </a:r>
+          </a:p>
+          <a:p>
+            <a:pPr>
+              <a:spcBef>
+                <a:spcPts val="0"/>
+              </a:spcBef>
+              <a:spcAft>
+                <a:spcPts val="0"/>
+              </a:spcAft>
+            </a:pPr>
+          </a:p>
+          <a:p>
+            <a:pPr>
+              <a:lnSpc>
+                <a:spcPct val="105000"/>
+              </a:lnSpc>
+            </a:pPr>
+            <a:r>
+              <a:rPr b="0" sz="1900">
+                <a:solidFill>
+                  <a:srgbClr val="37352F"/>
+                </a:solidFill>
+              </a:rPr>
+              <a:t>Fa Sol Do</a:t>
+            </a:r>
+          </a:p>
+          <a:p>
+            <a:pPr>
+              <a:spcBef>
+                <a:spcPts val="0"/>
+              </a:spcBef>
+              <a:spcAft>
+                <a:spcPts val="0"/>
+              </a:spcAft>
+            </a:pPr>
+          </a:p>
+          <a:p>
+            <a:pPr>
+              <a:lnSpc>
+                <a:spcPct val="105000"/>
+              </a:lnSpc>
+            </a:pPr>
+            <a:r>
+              <a:rPr b="0" sz="1900">
+                <a:solidFill>
+                  <a:srgbClr val="37352F"/>
+                </a:solidFill>
+              </a:rPr>
+              <a:t>CAMBIA MI PAN EN TU CARNE</a:t>
+            </a:r>
+          </a:p>
+          <a:p>
+            <a:pPr>
+              <a:spcBef>
+                <a:spcPts val="0"/>
+              </a:spcBef>
+              <a:spcAft>
+                <a:spcPts val="0"/>
+              </a:spcAft>
+            </a:pPr>
+          </a:p>
+          <a:p>
+            <a:pPr>
+              <a:lnSpc>
+                <a:spcPct val="105000"/>
+              </a:lnSpc>
+            </a:pPr>
+            <a:r>
+              <a:rPr b="0" sz="1900">
+                <a:solidFill>
+                  <a:srgbClr val="37352F"/>
+                </a:solidFill>
+              </a:rPr>
+              <a:t>Mim Lam</a:t>
+            </a:r>
+          </a:p>
+          <a:p>
+            <a:pPr>
+              <a:spcBef>
+                <a:spcPts val="0"/>
+              </a:spcBef>
+              <a:spcAft>
+                <a:spcPts val="0"/>
+              </a:spcAft>
+            </a:pPr>
+          </a:p>
+          <a:p>
+            <a:pPr>
+              <a:lnSpc>
+                <a:spcPct val="105000"/>
+              </a:lnSpc>
+            </a:pPr>
+            <a:r>
+              <a:rPr b="0" sz="1900">
+                <a:solidFill>
+                  <a:srgbClr val="37352F"/>
+                </a:solidFill>
+              </a:rPr>
+              <a:t>Y MI VINO EN TU SANGRE</a:t>
+            </a:r>
+          </a:p>
+          <a:p>
+            <a:pPr>
+              <a:spcBef>
+                <a:spcPts val="0"/>
+              </a:spcBef>
+              <a:spcAft>
+                <a:spcPts val="0"/>
+              </a:spcAft>
+            </a:pPr>
+          </a:p>
+          <a:p>
+            <a:pPr>
+              <a:lnSpc>
+                <a:spcPct val="105000"/>
+              </a:lnSpc>
+            </a:pPr>
+            <a:r>
+              <a:rPr b="0" sz="1900">
+                <a:solidFill>
+                  <a:srgbClr val="37352F"/>
+                </a:solidFill>
+              </a:rPr>
+              <a:t>Rem Sol Do Do7</a:t>
+            </a:r>
+          </a:p>
+          <a:p>
+            <a:pPr>
+              <a:spcBef>
+                <a:spcPts val="0"/>
+              </a:spcBef>
+              <a:spcAft>
+                <a:spcPts val="0"/>
+              </a:spcAft>
+            </a:pPr>
+          </a:p>
+          <a:p>
+            <a:pPr>
+              <a:lnSpc>
+                <a:spcPct val="105000"/>
+              </a:lnSpc>
+            </a:pPr>
+            <a:r>
+              <a:rPr b="0" sz="1900">
+                <a:solidFill>
+                  <a:srgbClr val="37352F"/>
+                </a:solidFill>
+              </a:rPr>
+              <a:t>Y A MI SEÑOR RENUÉVAME,</a:t>
+            </a:r>
+          </a:p>
+          <a:p>
+            <a:pPr>
+              <a:spcBef>
+                <a:spcPts val="0"/>
+              </a:spcBef>
+              <a:spcAft>
+                <a:spcPts val="0"/>
+              </a:spcAft>
+            </a:pPr>
+          </a:p>
+          <a:p>
+            <a:pPr>
+              <a:lnSpc>
+                <a:spcPct val="105000"/>
+              </a:lnSpc>
+            </a:pPr>
+            <a:r>
+              <a:rPr b="0" sz="1900">
+                <a:solidFill>
+                  <a:srgbClr val="37352F"/>
+                </a:solidFill>
+              </a:rPr>
+              <a:t>Fa Sol Do</a:t>
+            </a:r>
+          </a:p>
+          <a:p>
+            <a:pPr>
+              <a:spcBef>
+                <a:spcPts val="0"/>
+              </a:spcBef>
+              <a:spcAft>
+                <a:spcPts val="0"/>
+              </a:spcAft>
+            </a:pPr>
+          </a:p>
+          <a:p>
+            <a:pPr>
+              <a:lnSpc>
+                <a:spcPct val="105000"/>
+              </a:lnSpc>
+            </a:pPr>
+            <a:r>
+              <a:rPr b="0" sz="1900">
+                <a:solidFill>
+                  <a:srgbClr val="37352F"/>
+                </a:solidFill>
+              </a:rPr>
+              <a:t>LÍMPIAME</a:t>
+            </a:r>
+          </a:p>
+          <a:p>
+            <a:pPr>
+              <a:lnSpc>
+                <a:spcPct val="105000"/>
+              </a:lnSpc>
+            </a:pPr>
+            <a:r>
+              <a:rPr b="0" sz="1900">
+                <a:solidFill>
+                  <a:srgbClr val="37352F"/>
+                </a:solidFill>
+              </a:rPr>
+              <a:t>Y SÁLVAME</a:t>
+            </a:r>
+          </a:p>
+          <a:p>
+            <a:pPr>
+              <a:spcBef>
+                <a:spcPts val="0"/>
+              </a:spcBef>
+              <a:spcAft>
+                <a:spcPts val="0"/>
+              </a:spcAft>
+            </a:pPr>
+          </a:p>
+          <a:p>
+            <a:pPr>
+              <a:lnSpc>
+                <a:spcPct val="105000"/>
+              </a:lnSpc>
+            </a:pPr>
+            <a:r>
+              <a:rPr b="0" sz="1900">
+                <a:solidFill>
+                  <a:srgbClr val="37352F"/>
+                </a:solidFill>
+              </a:rPr>
+              <a:t>Esto te lo doy, no solo, mi</a:t>
+            </a:r>
+          </a:p>
+          <a:p>
+            <a:pPr>
+              <a:lnSpc>
+                <a:spcPct val="105000"/>
+              </a:lnSpc>
+            </a:pPr>
+            <a:r>
+              <a:rPr b="0" sz="1900">
+                <a:solidFill>
+                  <a:srgbClr val="37352F"/>
+                </a:solidFill>
+              </a:rPr>
+              <a:t>Señor,</a:t>
+            </a:r>
+          </a:p>
+          <a:p>
+            <a:pPr>
+              <a:spcBef>
+                <a:spcPts val="0"/>
+              </a:spcBef>
+              <a:spcAft>
+                <a:spcPts val="0"/>
+              </a:spcAft>
+            </a:pPr>
+          </a:p>
+          <a:p>
+            <a:pPr>
+              <a:lnSpc>
+                <a:spcPct val="105000"/>
+              </a:lnSpc>
+            </a:pPr>
+            <a:r>
+              <a:rPr b="0" sz="1900">
+                <a:solidFill>
+                  <a:srgbClr val="37352F"/>
+                </a:solidFill>
+              </a:rPr>
+              <a:t>esta voz también es mi hermano.</a:t>
+            </a:r>
+          </a:p>
+          <a:p>
+            <a:pPr>
+              <a:spcBef>
+                <a:spcPts val="0"/>
+              </a:spcBef>
+              <a:spcAft>
+                <a:spcPts val="0"/>
+              </a:spcAft>
+            </a:pPr>
+          </a:p>
+          <a:p>
+            <a:pPr>
+              <a:lnSpc>
+                <a:spcPct val="105000"/>
+              </a:lnSpc>
+            </a:pPr>
+            <a:r>
+              <a:rPr b="0" sz="1900">
+                <a:solidFill>
+                  <a:srgbClr val="37352F"/>
+                </a:solidFill>
+              </a:rPr>
+              <a:t>Es la unión, la paz y el orden,</a:t>
+            </a:r>
+          </a:p>
+          <a:p>
+            <a:pPr>
+              <a:spcBef>
+                <a:spcPts val="0"/>
+              </a:spcBef>
+              <a:spcAft>
+                <a:spcPts val="0"/>
+              </a:spcAft>
+            </a:pPr>
+          </a:p>
+          <a:p>
+            <a:pPr>
+              <a:lnSpc>
+                <a:spcPct val="105000"/>
+              </a:lnSpc>
+            </a:pPr>
+            <a:r>
+              <a:rPr b="0" sz="1900">
+                <a:solidFill>
+                  <a:srgbClr val="37352F"/>
+                </a:solidFill>
+              </a:rPr>
+              <a:t>la armonía y felicidad,</a:t>
+            </a:r>
+          </a:p>
+          <a:p>
+            <a:pPr>
+              <a:spcBef>
+                <a:spcPts val="0"/>
+              </a:spcBef>
+              <a:spcAft>
+                <a:spcPts val="0"/>
+              </a:spcAft>
+            </a:pPr>
+          </a:p>
+          <a:p>
+            <a:pPr>
+              <a:lnSpc>
+                <a:spcPct val="105000"/>
+              </a:lnSpc>
+            </a:pPr>
+            <a:r>
+              <a:rPr b="0" sz="1900">
+                <a:solidFill>
+                  <a:srgbClr val="37352F"/>
+                </a:solidFill>
+              </a:rPr>
+              <a:t>es un canto en comunidad.</a:t>
             </a:r>
           </a:p>
         </p:txBody>
@@ -6027,9 +6897,33 @@
           </a:prstGeom>
         </p:spPr>
       </p:pic>
-      <p:sp>
-        <p:nvSpPr>
-          <p:cNvPr id="4" name="Rounded Rectangle 3"/>
+      <p:pic>
+        <p:nvPicPr>
+          <p:cNvPr id="4" name="Picture 3" descr="fano_20140896_ii_domingo_de_adviento_dile_sí.jpg"/>
+          <p:cNvPicPr>
+            <a:picLocks noChangeAspect="1"/>
+          </p:cNvPicPr>
+          <p:nvPr/>
+        </p:nvPicPr>
+        <p:blipFill>
+          <a:blip r:embed="rId3"/>
+          <a:stretch>
+            <a:fillRect/>
+          </a:stretch>
+        </p:blipFill>
+        <p:spPr>
+          <a:xfrm>
+            <a:off x="6675120" y="1005840"/>
+            <a:ext cx="4334278" cy="2560320"/>
+          </a:xfrm>
+          <a:prstGeom prst="rect">
+            <a:avLst/>
+          </a:prstGeom>
+        </p:spPr>
+      </p:pic>
+      <p:sp>
+        <p:nvSpPr>
+          <p:cNvPr id="5" name="Rounded Rectangle 4"/>
           <p:cNvSpPr/>
           <p:nvPr/>
         </p:nvSpPr>
@@ -6076,7 +6970,7 @@
       </p:sp>
       <p:sp>
         <p:nvSpPr>
-          <p:cNvPr id="5" name="Rectangle 4"/>
+          <p:cNvPr id="6" name="Rectangle 5"/>
           <p:cNvSpPr/>
           <p:nvPr/>
         </p:nvSpPr>
@@ -6119,7 +7013,7 @@
       </p:sp>
       <p:sp>
         <p:nvSpPr>
-          <p:cNvPr id="6" name="TextBox 5"/>
+          <p:cNvPr id="7" name="TextBox 6"/>
           <p:cNvSpPr txBox="1"/>
           <p:nvPr/>
         </p:nvSpPr>
@@ -6143,7 +7037,7 @@
                   <a:srgbClr val="7C3AED"/>
                 </a:solidFill>
               </a:rPr>
-              <a:t>GRITO SANTO</a:t>
+              <a:t>SEÑOR SANTO</a:t>
             </a:r>
           </a:p>
           <a:p>
@@ -6168,382 +7062,537 @@
                   <a:srgbClr val="37352F"/>
                 </a:solidFill>
               </a:rPr>
-              <a:t>Hoy quiero proclamarte,</a:t>
-            </a:r>
-          </a:p>
-          <a:p>
-            <a:pPr>
-              <a:lnSpc>
-                <a:spcPct val="105000"/>
-              </a:lnSpc>
-            </a:pPr>
-            <a:r>
-              <a:rPr b="0" sz="1900">
-                <a:solidFill>
-                  <a:srgbClr val="37352F"/>
-                </a:solidFill>
-              </a:rPr>
-              <a:t>quiero cantar a tu nombre</a:t>
-            </a:r>
-          </a:p>
-          <a:p>
-            <a:pPr>
-              <a:lnSpc>
-                <a:spcPct val="105000"/>
-              </a:lnSpc>
-            </a:pPr>
-            <a:r>
-              <a:rPr b="0" sz="1900">
-                <a:solidFill>
-                  <a:srgbClr val="37352F"/>
-                </a:solidFill>
-              </a:rPr>
-              <a:t>santo,</a:t>
-            </a:r>
-          </a:p>
-          <a:p>
-            <a:pPr>
-              <a:lnSpc>
-                <a:spcPct val="105000"/>
-              </a:lnSpc>
-            </a:pPr>
-            <a:r>
-              <a:rPr b="0" sz="1900">
-                <a:solidFill>
-                  <a:srgbClr val="37352F"/>
-                </a:solidFill>
-              </a:rPr>
-              <a:t>quiero bailar ante tu presencia</a:t>
-            </a:r>
-          </a:p>
-          <a:p>
-            <a:pPr>
-              <a:lnSpc>
-                <a:spcPct val="105000"/>
-              </a:lnSpc>
-            </a:pPr>
-            <a:r>
-              <a:rPr b="0" sz="1900">
-                <a:solidFill>
-                  <a:srgbClr val="37352F"/>
-                </a:solidFill>
-              </a:rPr>
-              <a:t>hasta morir.</a:t>
-            </a:r>
-          </a:p>
-          <a:p>
-            <a:pPr>
-              <a:lnSpc>
-                <a:spcPct val="105000"/>
-              </a:lnSpc>
-            </a:pPr>
-            <a:r>
-              <a:rPr b="0" sz="1900">
-                <a:solidFill>
-                  <a:srgbClr val="37352F"/>
-                </a:solidFill>
-              </a:rPr>
-              <a:t>Y bendecirte, mi Dios; amarte,</a:t>
-            </a:r>
-          </a:p>
-          <a:p>
-            <a:pPr>
-              <a:lnSpc>
-                <a:spcPct val="105000"/>
-              </a:lnSpc>
-            </a:pPr>
-            <a:r>
-              <a:rPr b="0" sz="1900">
-                <a:solidFill>
-                  <a:srgbClr val="37352F"/>
-                </a:solidFill>
-              </a:rPr>
-              <a:t>no detenerme hasta encontrarte</a:t>
-            </a:r>
-          </a:p>
-          <a:p>
-            <a:pPr>
-              <a:lnSpc>
-                <a:spcPct val="105000"/>
-              </a:lnSpc>
-            </a:pPr>
-            <a:r>
-              <a:rPr b="0" sz="1900">
-                <a:solidFill>
-                  <a:srgbClr val="37352F"/>
-                </a:solidFill>
-              </a:rPr>
-              <a:t>buscar las sendas que me</a:t>
-            </a:r>
-          </a:p>
-          <a:p>
-            <a:pPr>
-              <a:lnSpc>
-                <a:spcPct val="105000"/>
-              </a:lnSpc>
-            </a:pPr>
-            <a:r>
-              <a:rPr b="0" sz="1900">
-                <a:solidFill>
-                  <a:srgbClr val="37352F"/>
-                </a:solidFill>
-              </a:rPr>
-              <a:t>conducen</a:t>
-            </a:r>
-          </a:p>
-          <a:p>
-            <a:pPr>
-              <a:lnSpc>
-                <a:spcPct val="105000"/>
-              </a:lnSpc>
-            </a:pPr>
-            <a:r>
-              <a:rPr b="0" sz="1900">
-                <a:solidFill>
-                  <a:srgbClr val="37352F"/>
-                </a:solidFill>
-              </a:rPr>
-              <a:t>hacia la luz.</a:t>
-            </a:r>
-          </a:p>
-          <a:p>
-            <a:pPr>
-              <a:lnSpc>
-                <a:spcPct val="105000"/>
-              </a:lnSpc>
-            </a:pPr>
-            <a:r>
-              <a:rPr b="0" sz="1900">
-                <a:solidFill>
-                  <a:srgbClr val="37352F"/>
-                </a:solidFill>
-              </a:rPr>
-              <a:t>Y GRITO SANTO, SANTO, SANTO.</a:t>
-            </a:r>
-          </a:p>
-          <a:p>
-            <a:pPr>
-              <a:lnSpc>
-                <a:spcPct val="105000"/>
-              </a:lnSpc>
-            </a:pPr>
-            <a:r>
-              <a:rPr b="0" sz="1900">
-                <a:solidFill>
-                  <a:srgbClr val="37352F"/>
-                </a:solidFill>
-              </a:rPr>
-              <a:t>TÚ ERES SANTO, SANTO, SANTO.</a:t>
-            </a:r>
-          </a:p>
-          <a:p>
-            <a:pPr>
-              <a:lnSpc>
-                <a:spcPct val="105000"/>
-              </a:lnSpc>
-            </a:pPr>
-            <a:r>
-              <a:rPr b="0" sz="1900">
-                <a:solidFill>
-                  <a:srgbClr val="37352F"/>
-                </a:solidFill>
-              </a:rPr>
-              <a:t>TÚ SIEMPRE SANTO, SANTO, SANTO;</a:t>
-            </a:r>
-          </a:p>
-          <a:p>
-            <a:pPr>
-              <a:lnSpc>
-                <a:spcPct val="105000"/>
-              </a:lnSpc>
-            </a:pPr>
-            <a:r>
-              <a:rPr b="0" sz="1900">
-                <a:solidFill>
-                  <a:srgbClr val="37352F"/>
-                </a:solidFill>
-              </a:rPr>
-              <a:t>SANTO ERES TÚ. (Bis)</a:t>
-            </a:r>
-          </a:p>
-          <a:p>
-            <a:pPr>
-              <a:lnSpc>
-                <a:spcPct val="105000"/>
-              </a:lnSpc>
-            </a:pPr>
-            <a:r>
-              <a:rPr b="0" sz="1900">
-                <a:solidFill>
-                  <a:srgbClr val="37352F"/>
-                </a:solidFill>
-              </a:rPr>
-              <a:t>Siento en mí tu mirada</a:t>
-            </a:r>
-          </a:p>
-          <a:p>
-            <a:pPr>
-              <a:lnSpc>
-                <a:spcPct val="105000"/>
-              </a:lnSpc>
-            </a:pPr>
-            <a:r>
-              <a:rPr b="0" sz="1900">
-                <a:solidFill>
-                  <a:srgbClr val="37352F"/>
-                </a:solidFill>
-              </a:rPr>
-              <a:t>que me traspasa hasta lo más</a:t>
-            </a:r>
-          </a:p>
-          <a:p>
-            <a:pPr>
-              <a:lnSpc>
-                <a:spcPct val="105000"/>
-              </a:lnSpc>
-            </a:pPr>
-            <a:r>
-              <a:rPr b="0" sz="1900">
-                <a:solidFill>
-                  <a:srgbClr val="37352F"/>
-                </a:solidFill>
-              </a:rPr>
-              <a:t>hondo</a:t>
-            </a:r>
-          </a:p>
-          <a:p>
-            <a:pPr>
-              <a:lnSpc>
-                <a:spcPct val="105000"/>
-              </a:lnSpc>
-            </a:pPr>
-            <a:r>
-              <a:rPr b="0" sz="1900">
-                <a:solidFill>
-                  <a:srgbClr val="37352F"/>
-                </a:solidFill>
-              </a:rPr>
-              <a:t>como una fuerza que me arrastra</a:t>
-            </a:r>
-          </a:p>
-          <a:p>
-            <a:pPr>
-              <a:lnSpc>
-                <a:spcPct val="105000"/>
-              </a:lnSpc>
-            </a:pPr>
-            <a:r>
-              <a:rPr b="0" sz="1900">
-                <a:solidFill>
-                  <a:srgbClr val="37352F"/>
-                </a:solidFill>
-              </a:rPr>
-              <a:t>hacia tu cruz.</a:t>
-            </a:r>
-          </a:p>
-          <a:p>
-            <a:pPr>
-              <a:lnSpc>
-                <a:spcPct val="105000"/>
-              </a:lnSpc>
-            </a:pPr>
-            <a:r>
-              <a:rPr b="0" sz="1900">
-                <a:solidFill>
-                  <a:srgbClr val="37352F"/>
-                </a:solidFill>
-              </a:rPr>
-              <a:t>Y allí me limpias, me</a:t>
-            </a:r>
-          </a:p>
-          <a:p>
-            <a:pPr>
-              <a:lnSpc>
-                <a:spcPct val="105000"/>
-              </a:lnSpc>
-            </a:pPr>
-            <a:r>
-              <a:rPr b="0" sz="1900">
-                <a:solidFill>
-                  <a:srgbClr val="37352F"/>
-                </a:solidFill>
-              </a:rPr>
-              <a:t>purificas,</a:t>
-            </a:r>
-          </a:p>
-          <a:p>
-            <a:pPr>
-              <a:lnSpc>
-                <a:spcPct val="105000"/>
-              </a:lnSpc>
-            </a:pPr>
-            <a:r>
-              <a:rPr b="0" sz="1900">
-                <a:solidFill>
-                  <a:srgbClr val="37352F"/>
-                </a:solidFill>
-              </a:rPr>
-              <a:t>sacas de mí el corazón de</a:t>
-            </a:r>
-          </a:p>
-          <a:p>
-            <a:pPr>
-              <a:lnSpc>
-                <a:spcPct val="105000"/>
-              </a:lnSpc>
-            </a:pPr>
-            <a:r>
-              <a:rPr b="0" sz="1900">
-                <a:solidFill>
-                  <a:srgbClr val="37352F"/>
-                </a:solidFill>
-              </a:rPr>
-              <a:t>piedra</a:t>
-            </a:r>
-          </a:p>
-          <a:p>
-            <a:pPr>
-              <a:lnSpc>
-                <a:spcPct val="105000"/>
-              </a:lnSpc>
-            </a:pPr>
-            <a:r>
-              <a:rPr b="0" sz="1900">
-                <a:solidFill>
-                  <a:srgbClr val="37352F"/>
-                </a:solidFill>
-              </a:rPr>
-              <a:t>y me transformas en criatura</a:t>
-            </a:r>
-          </a:p>
-          <a:p>
-            <a:pPr>
-              <a:lnSpc>
-                <a:spcPct val="105000"/>
-              </a:lnSpc>
-            </a:pPr>
-            <a:r>
-              <a:rPr b="0" sz="1900">
-                <a:solidFill>
-                  <a:srgbClr val="37352F"/>
-                </a:solidFill>
-              </a:rPr>
-              <a:t>viva por ti.</a:t>
-            </a:r>
-          </a:p>
-          <a:p>
-            <a:pPr>
-              <a:lnSpc>
-                <a:spcPct val="105000"/>
-              </a:lnSpc>
-            </a:pPr>
-            <a:r>
-              <a:rPr b="0" sz="1900">
-                <a:solidFill>
-                  <a:srgbClr val="37352F"/>
-                </a:solidFill>
-              </a:rPr>
-              <a:t>Y GRITO SANTO…</a:t>
+              <a:t>Re</a:t>
+            </a:r>
+          </a:p>
+          <a:p>
+            <a:pPr>
+              <a:spcBef>
+                <a:spcPts val="0"/>
+              </a:spcBef>
+              <a:spcAft>
+                <a:spcPts val="0"/>
+              </a:spcAft>
+            </a:pPr>
+          </a:p>
+          <a:p>
+            <a:pPr>
+              <a:lnSpc>
+                <a:spcPct val="105000"/>
+              </a:lnSpc>
+            </a:pPr>
+            <a:r>
+              <a:rPr b="0" sz="1900">
+                <a:solidFill>
+                  <a:srgbClr val="37352F"/>
+                </a:solidFill>
+              </a:rPr>
+              <a:t>Sol</a:t>
+            </a:r>
+          </a:p>
+          <a:p>
+            <a:pPr>
+              <a:spcBef>
+                <a:spcPts val="0"/>
+              </a:spcBef>
+              <a:spcAft>
+                <a:spcPts val="0"/>
+              </a:spcAft>
+            </a:pPr>
+          </a:p>
+          <a:p>
+            <a:pPr>
+              <a:lnSpc>
+                <a:spcPct val="105000"/>
+              </a:lnSpc>
+            </a:pPr>
+            <a:r>
+              <a:rPr b="0" sz="1900">
+                <a:solidFill>
+                  <a:srgbClr val="37352F"/>
+                </a:solidFill>
+              </a:rPr>
+              <a:t>Re</a:t>
+            </a:r>
+          </a:p>
+          <a:p>
+            <a:pPr>
+              <a:spcBef>
+                <a:spcPts val="0"/>
+              </a:spcBef>
+              <a:spcAft>
+                <a:spcPts val="0"/>
+              </a:spcAft>
+            </a:pPr>
+          </a:p>
+          <a:p>
+            <a:pPr>
+              <a:lnSpc>
+                <a:spcPct val="105000"/>
+              </a:lnSpc>
+            </a:pPr>
+            <a:r>
+              <a:rPr b="0" sz="1900">
+                <a:solidFill>
+                  <a:srgbClr val="37352F"/>
+                </a:solidFill>
+              </a:rPr>
+              <a:t>Sol</a:t>
+            </a:r>
+          </a:p>
+          <a:p>
+            <a:pPr>
+              <a:spcBef>
+                <a:spcPts val="0"/>
+              </a:spcBef>
+              <a:spcAft>
+                <a:spcPts val="0"/>
+              </a:spcAft>
+            </a:pPr>
+          </a:p>
+          <a:p>
+            <a:pPr>
+              <a:lnSpc>
+                <a:spcPct val="105000"/>
+              </a:lnSpc>
+            </a:pPr>
+            <a:r>
+              <a:rPr b="0" sz="1900">
+                <a:solidFill>
+                  <a:srgbClr val="37352F"/>
+                </a:solidFill>
+              </a:rPr>
+              <a:t>Señor santo, Dios del universo,</a:t>
+            </a:r>
+          </a:p>
+          <a:p>
+            <a:pPr>
+              <a:lnSpc>
+                <a:spcPct val="105000"/>
+              </a:lnSpc>
+            </a:pPr>
+            <a:r>
+              <a:rPr b="0" sz="1900">
+                <a:solidFill>
+                  <a:srgbClr val="37352F"/>
+                </a:solidFill>
+              </a:rPr>
+              <a:t>Tú.</a:t>
+            </a:r>
+          </a:p>
+          <a:p>
+            <a:pPr>
+              <a:spcBef>
+                <a:spcPts val="0"/>
+              </a:spcBef>
+              <a:spcAft>
+                <a:spcPts val="0"/>
+              </a:spcAft>
+            </a:pPr>
+          </a:p>
+          <a:p>
+            <a:pPr>
+              <a:lnSpc>
+                <a:spcPct val="105000"/>
+              </a:lnSpc>
+            </a:pPr>
+            <a:r>
+              <a:rPr b="0" sz="1900">
+                <a:solidFill>
+                  <a:srgbClr val="37352F"/>
+                </a:solidFill>
+              </a:rPr>
+              <a:t>Re</a:t>
+            </a:r>
+          </a:p>
+          <a:p>
+            <a:pPr>
+              <a:spcBef>
+                <a:spcPts val="0"/>
+              </a:spcBef>
+              <a:spcAft>
+                <a:spcPts val="0"/>
+              </a:spcAft>
+            </a:pPr>
+          </a:p>
+          <a:p>
+            <a:pPr>
+              <a:lnSpc>
+                <a:spcPct val="105000"/>
+              </a:lnSpc>
+            </a:pPr>
+            <a:r>
+              <a:rPr b="0" sz="1900">
+                <a:solidFill>
+                  <a:srgbClr val="37352F"/>
+                </a:solidFill>
+              </a:rPr>
+              <a:t>Sol</a:t>
+            </a:r>
+          </a:p>
+          <a:p>
+            <a:pPr>
+              <a:spcBef>
+                <a:spcPts val="0"/>
+              </a:spcBef>
+              <a:spcAft>
+                <a:spcPts val="0"/>
+              </a:spcAft>
+            </a:pPr>
+          </a:p>
+          <a:p>
+            <a:pPr>
+              <a:lnSpc>
+                <a:spcPct val="105000"/>
+              </a:lnSpc>
+            </a:pPr>
+            <a:r>
+              <a:rPr b="0" sz="1900">
+                <a:solidFill>
+                  <a:srgbClr val="37352F"/>
+                </a:solidFill>
+              </a:rPr>
+              <a:t>La</a:t>
+            </a:r>
+          </a:p>
+          <a:p>
+            <a:pPr>
+              <a:spcBef>
+                <a:spcPts val="0"/>
+              </a:spcBef>
+              <a:spcAft>
+                <a:spcPts val="0"/>
+              </a:spcAft>
+            </a:pPr>
+          </a:p>
+          <a:p>
+            <a:pPr>
+              <a:lnSpc>
+                <a:spcPct val="105000"/>
+              </a:lnSpc>
+            </a:pPr>
+            <a:r>
+              <a:rPr b="0" sz="1900">
+                <a:solidFill>
+                  <a:srgbClr val="37352F"/>
+                </a:solidFill>
+              </a:rPr>
+              <a:t>Llenos están cielo y tierra de</a:t>
+            </a:r>
+          </a:p>
+          <a:p>
+            <a:pPr>
+              <a:lnSpc>
+                <a:spcPct val="105000"/>
+              </a:lnSpc>
+            </a:pPr>
+            <a:r>
+              <a:rPr b="0" sz="1900">
+                <a:solidFill>
+                  <a:srgbClr val="37352F"/>
+                </a:solidFill>
+              </a:rPr>
+              <a:t>tu gloria.</a:t>
+            </a:r>
+          </a:p>
+          <a:p>
+            <a:pPr>
+              <a:spcBef>
+                <a:spcPts val="0"/>
+              </a:spcBef>
+              <a:spcAft>
+                <a:spcPts val="0"/>
+              </a:spcAft>
+            </a:pPr>
+          </a:p>
+          <a:p>
+            <a:pPr>
+              <a:lnSpc>
+                <a:spcPct val="105000"/>
+              </a:lnSpc>
+            </a:pPr>
+            <a:r>
+              <a:rPr b="0" sz="1900">
+                <a:solidFill>
+                  <a:srgbClr val="37352F"/>
+                </a:solidFill>
+              </a:rPr>
+              <a:t>Sol</a:t>
+            </a:r>
+          </a:p>
+          <a:p>
+            <a:pPr>
+              <a:spcBef>
+                <a:spcPts val="0"/>
+              </a:spcBef>
+              <a:spcAft>
+                <a:spcPts val="0"/>
+              </a:spcAft>
+            </a:pPr>
+          </a:p>
+          <a:p>
+            <a:pPr>
+              <a:lnSpc>
+                <a:spcPct val="105000"/>
+              </a:lnSpc>
+            </a:pPr>
+            <a:r>
+              <a:rPr b="0" sz="1900">
+                <a:solidFill>
+                  <a:srgbClr val="37352F"/>
+                </a:solidFill>
+              </a:rPr>
+              <a:t>La</a:t>
+            </a:r>
+          </a:p>
+          <a:p>
+            <a:pPr>
+              <a:spcBef>
+                <a:spcPts val="0"/>
+              </a:spcBef>
+              <a:spcAft>
+                <a:spcPts val="0"/>
+              </a:spcAft>
+            </a:pPr>
+          </a:p>
+          <a:p>
+            <a:pPr>
+              <a:lnSpc>
+                <a:spcPct val="105000"/>
+              </a:lnSpc>
+            </a:pPr>
+            <a:r>
+              <a:rPr b="0" sz="1900">
+                <a:solidFill>
+                  <a:srgbClr val="37352F"/>
+                </a:solidFill>
+              </a:rPr>
+              <a:t>Bendito aquél que viene</a:t>
+            </a:r>
+          </a:p>
+          <a:p>
+            <a:pPr>
+              <a:spcBef>
+                <a:spcPts val="0"/>
+              </a:spcBef>
+              <a:spcAft>
+                <a:spcPts val="0"/>
+              </a:spcAft>
+            </a:pPr>
+          </a:p>
+          <a:p>
+            <a:pPr>
+              <a:lnSpc>
+                <a:spcPct val="105000"/>
+              </a:lnSpc>
+            </a:pPr>
+            <a:r>
+              <a:rPr b="0" sz="1900">
+                <a:solidFill>
+                  <a:srgbClr val="37352F"/>
+                </a:solidFill>
+              </a:rPr>
+              <a:t>Re</a:t>
+            </a:r>
+          </a:p>
+          <a:p>
+            <a:pPr>
+              <a:spcBef>
+                <a:spcPts val="0"/>
+              </a:spcBef>
+              <a:spcAft>
+                <a:spcPts val="0"/>
+              </a:spcAft>
+            </a:pPr>
+          </a:p>
+          <a:p>
+            <a:pPr>
+              <a:lnSpc>
+                <a:spcPct val="105000"/>
+              </a:lnSpc>
+            </a:pPr>
+            <a:r>
+              <a:rPr b="0" sz="1900">
+                <a:solidFill>
+                  <a:srgbClr val="37352F"/>
+                </a:solidFill>
+              </a:rPr>
+              <a:t>Sim</a:t>
+            </a:r>
+          </a:p>
+          <a:p>
+            <a:pPr>
+              <a:spcBef>
+                <a:spcPts val="0"/>
+              </a:spcBef>
+              <a:spcAft>
+                <a:spcPts val="0"/>
+              </a:spcAft>
+            </a:pPr>
+          </a:p>
+          <a:p>
+            <a:pPr>
+              <a:lnSpc>
+                <a:spcPct val="105000"/>
+              </a:lnSpc>
+            </a:pPr>
+            <a:r>
+              <a:rPr b="0" sz="1900">
+                <a:solidFill>
+                  <a:srgbClr val="37352F"/>
+                </a:solidFill>
+              </a:rPr>
+              <a:t>en nombre del señor.</a:t>
+            </a:r>
+          </a:p>
+          <a:p>
+            <a:pPr>
+              <a:spcBef>
+                <a:spcPts val="0"/>
+              </a:spcBef>
+              <a:spcAft>
+                <a:spcPts val="0"/>
+              </a:spcAft>
+            </a:pPr>
+          </a:p>
+          <a:p>
+            <a:pPr>
+              <a:lnSpc>
+                <a:spcPct val="105000"/>
+              </a:lnSpc>
+            </a:pPr>
+            <a:r>
+              <a:rPr b="0" sz="1900">
+                <a:solidFill>
+                  <a:srgbClr val="37352F"/>
+                </a:solidFill>
+              </a:rPr>
+              <a:t>Sol</a:t>
+            </a:r>
+          </a:p>
+          <a:p>
+            <a:pPr>
+              <a:spcBef>
+                <a:spcPts val="0"/>
+              </a:spcBef>
+              <a:spcAft>
+                <a:spcPts val="0"/>
+              </a:spcAft>
+            </a:pPr>
+          </a:p>
+          <a:p>
+            <a:pPr>
+              <a:lnSpc>
+                <a:spcPct val="105000"/>
+              </a:lnSpc>
+            </a:pPr>
+            <a:r>
+              <a:rPr b="0" sz="1900">
+                <a:solidFill>
+                  <a:srgbClr val="37352F"/>
+                </a:solidFill>
+              </a:rPr>
+              <a:t>La</a:t>
+            </a:r>
+          </a:p>
+          <a:p>
+            <a:pPr>
+              <a:spcBef>
+                <a:spcPts val="0"/>
+              </a:spcBef>
+              <a:spcAft>
+                <a:spcPts val="0"/>
+              </a:spcAft>
+            </a:pPr>
+          </a:p>
+          <a:p>
+            <a:pPr>
+              <a:lnSpc>
+                <a:spcPct val="105000"/>
+              </a:lnSpc>
+            </a:pPr>
+            <a:r>
+              <a:rPr b="0" sz="1900">
+                <a:solidFill>
+                  <a:srgbClr val="37352F"/>
+                </a:solidFill>
+              </a:rPr>
+              <a:t>Sol</a:t>
+            </a:r>
+          </a:p>
+          <a:p>
+            <a:pPr>
+              <a:spcBef>
+                <a:spcPts val="0"/>
+              </a:spcBef>
+              <a:spcAft>
+                <a:spcPts val="0"/>
+              </a:spcAft>
+            </a:pPr>
+          </a:p>
+          <a:p>
+            <a:pPr>
+              <a:lnSpc>
+                <a:spcPct val="105000"/>
+              </a:lnSpc>
+            </a:pPr>
+            <a:r>
+              <a:rPr b="0" sz="1900">
+                <a:solidFill>
+                  <a:srgbClr val="37352F"/>
+                </a:solidFill>
+              </a:rPr>
+              <a:t>Solm</a:t>
+            </a:r>
+          </a:p>
+          <a:p>
+            <a:pPr>
+              <a:spcBef>
+                <a:spcPts val="0"/>
+              </a:spcBef>
+              <a:spcAft>
+                <a:spcPts val="0"/>
+              </a:spcAft>
+            </a:pPr>
+          </a:p>
+          <a:p>
+            <a:pPr>
+              <a:lnSpc>
+                <a:spcPct val="105000"/>
+              </a:lnSpc>
+            </a:pPr>
+            <a:r>
+              <a:rPr b="0" sz="1900">
+                <a:solidFill>
+                  <a:srgbClr val="37352F"/>
+                </a:solidFill>
+              </a:rPr>
+              <a:t>Re-Sol-Re….</a:t>
+            </a:r>
+          </a:p>
+          <a:p>
+            <a:pPr>
+              <a:spcBef>
+                <a:spcPts val="0"/>
+              </a:spcBef>
+              <a:spcAft>
+                <a:spcPts val="0"/>
+              </a:spcAft>
+            </a:pPr>
+          </a:p>
+          <a:p>
+            <a:pPr>
+              <a:lnSpc>
+                <a:spcPct val="105000"/>
+              </a:lnSpc>
+            </a:pPr>
+            <a:r>
+              <a:rPr b="0" sz="1900">
+                <a:solidFill>
+                  <a:srgbClr val="37352F"/>
+                </a:solidFill>
+              </a:rPr>
+              <a:t>Hosanna en el cielo. (bis)</a:t>
             </a:r>
           </a:p>
         </p:txBody>
@@ -6906,7 +7955,7 @@
       </p:pic>
       <p:pic>
         <p:nvPicPr>
-          <p:cNvPr id="4" name="Picture 3" descr="20140953.jpg"/>
+          <p:cNvPr id="4" name="Picture 3" descr="fano_20140362_venid_vosotros_benditos_de_mi_padre.jpg"/>
           <p:cNvPicPr>
             <a:picLocks noChangeAspect="1"/>
           </p:cNvPicPr>
@@ -6921,7 +7970,7 @@
         <p:spPr>
           <a:xfrm>
             <a:off x="6675120" y="1005840"/>
-            <a:ext cx="3381657" cy="2560320"/>
+            <a:ext cx="1799905" cy="2560320"/>
           </a:xfrm>
           <a:prstGeom prst="rect">
             <a:avLst/>
@@ -7044,7 +8093,7 @@
                   <a:srgbClr val="7C3AED"/>
                 </a:solidFill>
               </a:rPr>
-              <a:t>PREPARAD EL CAMINO</a:t>
+              <a:t>AL CALOR DE LA PALABRA</a:t>
             </a:r>
           </a:p>
           <a:p>
@@ -7069,97 +8118,337 @@
                   <a:srgbClr val="37352F"/>
                 </a:solidFill>
               </a:rPr>
-              <a:t>PREPARAD EL CAMINO</a:t>
-            </a:r>
-          </a:p>
-          <a:p>
-            <a:pPr>
-              <a:lnSpc>
-                <a:spcPct val="105000"/>
-              </a:lnSpc>
-            </a:pPr>
-            <a:r>
-              <a:rPr b="0" sz="1900">
-                <a:solidFill>
-                  <a:srgbClr val="37352F"/>
-                </a:solidFill>
-              </a:rPr>
-              <a:t>PREPARAD EL CAMINO AL SEÑOR</a:t>
-            </a:r>
-          </a:p>
-          <a:p>
-            <a:pPr>
-              <a:lnSpc>
-                <a:spcPct val="105000"/>
-              </a:lnSpc>
-            </a:pPr>
-            <a:r>
-              <a:rPr b="0" sz="1900">
-                <a:solidFill>
-                  <a:srgbClr val="37352F"/>
-                </a:solidFill>
-              </a:rPr>
-              <a:t>Y ESCUCHAD LA PALABRA DE DIOS.(Bis)</a:t>
-            </a:r>
-          </a:p>
-          <a:p>
-            <a:pPr>
-              <a:lnSpc>
-                <a:spcPct val="105000"/>
-              </a:lnSpc>
-            </a:pPr>
-            <a:r>
-              <a:rPr b="0" sz="1900">
-                <a:solidFill>
-                  <a:srgbClr val="37352F"/>
-                </a:solidFill>
-              </a:rPr>
-              <a:t>Voz que clama en el desierto:</a:t>
-            </a:r>
-          </a:p>
-          <a:p>
-            <a:pPr>
-              <a:lnSpc>
-                <a:spcPct val="105000"/>
-              </a:lnSpc>
-            </a:pPr>
-            <a:r>
-              <a:rPr b="0" sz="1900">
-                <a:solidFill>
-                  <a:srgbClr val="37352F"/>
-                </a:solidFill>
-              </a:rPr>
-              <a:t>preparad los caminos de Dios,</a:t>
-            </a:r>
-          </a:p>
-          <a:p>
-            <a:pPr>
-              <a:lnSpc>
-                <a:spcPct val="105000"/>
-              </a:lnSpc>
-            </a:pPr>
-            <a:r>
-              <a:rPr b="0" sz="1900">
-                <a:solidFill>
-                  <a:srgbClr val="37352F"/>
-                </a:solidFill>
-              </a:rPr>
-              <a:t>desterrad la mentira por siempre,</a:t>
-            </a:r>
-          </a:p>
-          <a:p>
-            <a:pPr>
-              <a:lnSpc>
-                <a:spcPct val="105000"/>
-              </a:lnSpc>
-            </a:pPr>
-            <a:r>
-              <a:rPr b="0" sz="1900">
-                <a:solidFill>
-                  <a:srgbClr val="37352F"/>
-                </a:solidFill>
-              </a:rPr>
-              <a:t>preparad los caminos de Dios(Bis)</a:t>
+              <a:t>Cerca del hogar que calienta mi alma</a:t>
+            </a:r>
+          </a:p>
+          <a:p>
+            <a:pPr>
+              <a:lnSpc>
+                <a:spcPct val="105000"/>
+              </a:lnSpc>
+            </a:pPr>
+            <a:r>
+              <a:rPr b="0" sz="1900">
+                <a:solidFill>
+                  <a:srgbClr val="37352F"/>
+                </a:solidFill>
+              </a:rPr>
+              <a:t>quiero yo saber lo que en comunidad</a:t>
+            </a:r>
+          </a:p>
+          <a:p>
+            <a:pPr>
+              <a:lnSpc>
+                <a:spcPct val="105000"/>
+              </a:lnSpc>
+            </a:pPr>
+            <a:r>
+              <a:rPr b="0" sz="1900">
+                <a:solidFill>
+                  <a:srgbClr val="37352F"/>
+                </a:solidFill>
+              </a:rPr>
+              <a:t>Tú quieres de mi.</a:t>
+            </a:r>
+          </a:p>
+          <a:p>
+            <a:pPr>
+              <a:lnSpc>
+                <a:spcPct val="105000"/>
+              </a:lnSpc>
+            </a:pPr>
+            <a:r>
+              <a:rPr b="0" sz="1900">
+                <a:solidFill>
+                  <a:srgbClr val="37352F"/>
+                </a:solidFill>
+              </a:rPr>
+              <a:t>Sintiendo el calor que me da tu Palabra</a:t>
+            </a:r>
+          </a:p>
+          <a:p>
+            <a:pPr>
+              <a:lnSpc>
+                <a:spcPct val="105000"/>
+              </a:lnSpc>
+            </a:pPr>
+            <a:r>
+              <a:rPr b="0" sz="1900">
+                <a:solidFill>
+                  <a:srgbClr val="37352F"/>
+                </a:solidFill>
+              </a:rPr>
+              <a:t>quiero responder a lo que me pides</a:t>
+            </a:r>
+          </a:p>
+          <a:p>
+            <a:pPr>
+              <a:lnSpc>
+                <a:spcPct val="105000"/>
+              </a:lnSpc>
+            </a:pPr>
+            <a:r>
+              <a:rPr b="0" sz="1900">
+                <a:solidFill>
+                  <a:srgbClr val="37352F"/>
+                </a:solidFill>
+              </a:rPr>
+              <a:t>sin que a nada yo pueda temer.</a:t>
+            </a:r>
+          </a:p>
+          <a:p>
+            <a:pPr>
+              <a:lnSpc>
+                <a:spcPct val="105000"/>
+              </a:lnSpc>
+            </a:pPr>
+            <a:r>
+              <a:rPr b="0" sz="1900">
+                <a:solidFill>
+                  <a:srgbClr val="37352F"/>
+                </a:solidFill>
+              </a:rPr>
+              <a:t>A NADA, A NADA NUNCA HE DE TEMER,</a:t>
+            </a:r>
+          </a:p>
+          <a:p>
+            <a:pPr>
+              <a:lnSpc>
+                <a:spcPct val="105000"/>
+              </a:lnSpc>
+            </a:pPr>
+            <a:r>
+              <a:rPr b="0" sz="1900">
+                <a:solidFill>
+                  <a:srgbClr val="37352F"/>
+                </a:solidFill>
+              </a:rPr>
+              <a:t>YENDO JUNTO A TI CON TUS OJOS DE FE</a:t>
+            </a:r>
+          </a:p>
+          <a:p>
+            <a:pPr>
+              <a:lnSpc>
+                <a:spcPct val="105000"/>
+              </a:lnSpc>
+            </a:pPr>
+            <a:r>
+              <a:rPr b="0" sz="1900">
+                <a:solidFill>
+                  <a:srgbClr val="37352F"/>
+                </a:solidFill>
+              </a:rPr>
+              <a:t>NUNCA HE DE TEMER (BIS)</a:t>
+            </a:r>
+          </a:p>
+          <a:p>
+            <a:pPr>
+              <a:lnSpc>
+                <a:spcPct val="105000"/>
+              </a:lnSpc>
+            </a:pPr>
+            <a:r>
+              <a:rPr b="0" sz="1900">
+                <a:solidFill>
+                  <a:srgbClr val="37352F"/>
+                </a:solidFill>
+              </a:rPr>
+              <a:t>Sólo he de beber de tu fuente de agua,</a:t>
+            </a:r>
+          </a:p>
+          <a:p>
+            <a:pPr>
+              <a:lnSpc>
+                <a:spcPct val="105000"/>
+              </a:lnSpc>
+            </a:pPr>
+            <a:r>
+              <a:rPr b="0" sz="1900">
+                <a:solidFill>
+                  <a:srgbClr val="37352F"/>
+                </a:solidFill>
+              </a:rPr>
+              <a:t>sé que sólo ella será la que sacie</a:t>
+            </a:r>
+          </a:p>
+          <a:p>
+            <a:pPr>
+              <a:lnSpc>
+                <a:spcPct val="105000"/>
+              </a:lnSpc>
+            </a:pPr>
+            <a:r>
+              <a:rPr b="0" sz="1900">
+                <a:solidFill>
+                  <a:srgbClr val="37352F"/>
+                </a:solidFill>
+              </a:rPr>
+              <a:t>mi hambre y mi sed.</a:t>
+            </a:r>
+          </a:p>
+          <a:p>
+            <a:pPr>
+              <a:lnSpc>
+                <a:spcPct val="105000"/>
+              </a:lnSpc>
+            </a:pPr>
+            <a:r>
+              <a:rPr b="0" sz="1900">
+                <a:solidFill>
+                  <a:srgbClr val="37352F"/>
+                </a:solidFill>
+              </a:rPr>
+              <a:t>Tú eres el Señor que alimenta mi alma</a:t>
+            </a:r>
+          </a:p>
+          <a:p>
+            <a:pPr>
+              <a:lnSpc>
+                <a:spcPct val="105000"/>
+              </a:lnSpc>
+            </a:pPr>
+            <a:r>
+              <a:rPr b="0" sz="1900">
+                <a:solidFill>
+                  <a:srgbClr val="37352F"/>
+                </a:solidFill>
+              </a:rPr>
+              <a:t>y si hago mi opción por seguirte a Ti</a:t>
+            </a:r>
+          </a:p>
+          <a:p>
+            <a:pPr>
+              <a:lnSpc>
+                <a:spcPct val="105000"/>
+              </a:lnSpc>
+            </a:pPr>
+            <a:r>
+              <a:rPr b="0" sz="1900">
+                <a:solidFill>
+                  <a:srgbClr val="37352F"/>
+                </a:solidFill>
+              </a:rPr>
+              <a:t>nunca jamás yo temeré.</a:t>
+            </a:r>
+          </a:p>
+          <a:p>
+            <a:pPr>
+              <a:lnSpc>
+                <a:spcPct val="105000"/>
+              </a:lnSpc>
+            </a:pPr>
+            <a:r>
+              <a:rPr b="1" sz="1900">
+                <a:solidFill>
+                  <a:srgbClr val="37352F"/>
+                </a:solidFill>
+              </a:rPr>
+              <a:t>ESTRIBILLO</a:t>
+            </a:r>
+          </a:p>
+          <a:p>
+            <a:pPr>
+              <a:lnSpc>
+                <a:spcPct val="105000"/>
+              </a:lnSpc>
+            </a:pPr>
+            <a:r>
+              <a:rPr b="0" sz="1900">
+                <a:solidFill>
+                  <a:srgbClr val="37352F"/>
+                </a:solidFill>
+              </a:rPr>
+              <a:t>Llegan hasta mí momentos de calma</a:t>
+            </a:r>
+          </a:p>
+          <a:p>
+            <a:pPr>
+              <a:lnSpc>
+                <a:spcPct val="105000"/>
+              </a:lnSpc>
+            </a:pPr>
+            <a:r>
+              <a:rPr b="0" sz="1900">
+                <a:solidFill>
+                  <a:srgbClr val="37352F"/>
+                </a:solidFill>
+              </a:rPr>
+              <a:t>que me hacen dudar de si mi camino</a:t>
+            </a:r>
+          </a:p>
+          <a:p>
+            <a:pPr>
+              <a:lnSpc>
+                <a:spcPct val="105000"/>
+              </a:lnSpc>
+            </a:pPr>
+            <a:r>
+              <a:rPr b="0" sz="1900">
+                <a:solidFill>
+                  <a:srgbClr val="37352F"/>
+                </a:solidFill>
+              </a:rPr>
+              <a:t>se orienta hacia Ti.</a:t>
+            </a:r>
+          </a:p>
+          <a:p>
+            <a:pPr>
+              <a:lnSpc>
+                <a:spcPct val="105000"/>
+              </a:lnSpc>
+            </a:pPr>
+            <a:r>
+              <a:rPr b="0" sz="1900">
+                <a:solidFill>
+                  <a:srgbClr val="37352F"/>
+                </a:solidFill>
+              </a:rPr>
+              <a:t>Comienza a faltar la paz en mi alma</a:t>
+            </a:r>
+          </a:p>
+          <a:p>
+            <a:pPr>
+              <a:lnSpc>
+                <a:spcPct val="105000"/>
+              </a:lnSpc>
+            </a:pPr>
+            <a:r>
+              <a:rPr b="0" sz="1900">
+                <a:solidFill>
+                  <a:srgbClr val="37352F"/>
+                </a:solidFill>
+              </a:rPr>
+              <a:t>y sin esperarlo apareces Tú</a:t>
+            </a:r>
+          </a:p>
+          <a:p>
+            <a:pPr>
+              <a:lnSpc>
+                <a:spcPct val="105000"/>
+              </a:lnSpc>
+            </a:pPr>
+            <a:r>
+              <a:rPr b="0" sz="1900">
+                <a:solidFill>
+                  <a:srgbClr val="37352F"/>
+                </a:solidFill>
+              </a:rPr>
+              <a:t>haciéndome ver que ha nada he de temer.</a:t>
+            </a:r>
+          </a:p>
+          <a:p>
+            <a:pPr>
+              <a:lnSpc>
+                <a:spcPct val="105000"/>
+              </a:lnSpc>
+            </a:pPr>
+            <a:r>
+              <a:rPr b="1" sz="1900">
+                <a:solidFill>
+                  <a:srgbClr val="37352F"/>
+                </a:solidFill>
+              </a:rPr>
+              <a:t>ESTRIBILLO</a:t>
             </a:r>
           </a:p>
         </p:txBody>
@@ -8104,9 +9393,33 @@
           </a:prstGeom>
         </p:spPr>
       </p:pic>
-      <p:sp>
-        <p:nvSpPr>
-          <p:cNvPr id="4" name="Rounded Rectangle 3"/>
+      <p:pic>
+        <p:nvPicPr>
+          <p:cNvPr id="4" name="Picture 3" descr="fano_20140350_nuestra_victoria_está_en_saber_que_siendo_2_estamos_3.jpg"/>
+          <p:cNvPicPr>
+            <a:picLocks noChangeAspect="1"/>
+          </p:cNvPicPr>
+          <p:nvPr/>
+        </p:nvPicPr>
+        <p:blipFill>
+          <a:blip r:embed="rId3"/>
+          <a:stretch>
+            <a:fillRect/>
+          </a:stretch>
+        </p:blipFill>
+        <p:spPr>
+          <a:xfrm>
+            <a:off x="6675120" y="1005840"/>
+            <a:ext cx="3048000" cy="2560320"/>
+          </a:xfrm>
+          <a:prstGeom prst="rect">
+            <a:avLst/>
+          </a:prstGeom>
+        </p:spPr>
+      </p:pic>
+      <p:sp>
+        <p:nvSpPr>
+          <p:cNvPr id="5" name="Rounded Rectangle 4"/>
           <p:cNvSpPr/>
           <p:nvPr/>
         </p:nvSpPr>
@@ -8153,7 +9466,7 @@
       </p:sp>
       <p:sp>
         <p:nvSpPr>
-          <p:cNvPr id="5" name="Rectangle 4"/>
+          <p:cNvPr id="6" name="Rectangle 5"/>
           <p:cNvSpPr/>
           <p:nvPr/>
         </p:nvSpPr>
@@ -8196,7 +9509,7 @@
       </p:sp>
       <p:sp>
         <p:nvSpPr>
-          <p:cNvPr id="6" name="TextBox 5"/>
+          <p:cNvPr id="7" name="TextBox 6"/>
           <p:cNvSpPr txBox="1"/>
           <p:nvPr/>
         </p:nvSpPr>
@@ -8220,7 +9533,7 @@
                   <a:srgbClr val="7C3AED"/>
                 </a:solidFill>
               </a:rPr>
-              <a:t>RITO DE LA PAZ</a:t>
+              <a:t>LA PAZ TE DOY</a:t>
             </a:r>
           </a:p>
           <a:p>
@@ -8245,67 +9558,52 @@
                   <a:srgbClr val="37352F"/>
                 </a:solidFill>
               </a:rPr>
-              <a:t>Señor Jesucristo, que dijiste a tus apóstoles:</a:t>
-            </a:r>
-          </a:p>
-          <a:p>
-            <a:pPr>
-              <a:lnSpc>
-                <a:spcPct val="105000"/>
-              </a:lnSpc>
-            </a:pPr>
-            <a:r>
-              <a:rPr b="0" sz="1900">
-                <a:solidFill>
-                  <a:srgbClr val="37352F"/>
-                </a:solidFill>
-              </a:rPr>
-              <a:t>«La paz os dejo, mi paz os doy»,</a:t>
-            </a:r>
-          </a:p>
-          <a:p>
-            <a:pPr>
-              <a:lnSpc>
-                <a:spcPct val="105000"/>
-              </a:lnSpc>
-            </a:pPr>
-            <a:r>
-              <a:rPr b="0" sz="1900">
-                <a:solidFill>
-                  <a:srgbClr val="37352F"/>
-                </a:solidFill>
-              </a:rPr>
-              <a:t>no tengas en cuenta nuestros pecados,</a:t>
-            </a:r>
-          </a:p>
-          <a:p>
-            <a:pPr>
-              <a:lnSpc>
-                <a:spcPct val="105000"/>
-              </a:lnSpc>
-            </a:pPr>
-            <a:r>
-              <a:rPr b="0" sz="1900">
-                <a:solidFill>
-                  <a:srgbClr val="37352F"/>
-                </a:solidFill>
-              </a:rPr>
-              <a:t>sino la fe de tu Iglesia,</a:t>
-            </a:r>
-          </a:p>
-          <a:p>
-            <a:pPr>
-              <a:lnSpc>
-                <a:spcPct val="105000"/>
-              </a:lnSpc>
-            </a:pPr>
-            <a:r>
-              <a:rPr b="0" sz="1900">
-                <a:solidFill>
-                  <a:srgbClr val="37352F"/>
-                </a:solidFill>
-              </a:rPr>
-              <a:t>y conforme a tu palabra concédele la paz y la unidad.</a:t>
+              <a:t>La paz te doy a ti, mi hermano,_x000D_</a:t>
+            </a:r>
+          </a:p>
+          <a:p>
+            <a:pPr>
+              <a:lnSpc>
+                <a:spcPct val="105000"/>
+              </a:lnSpc>
+            </a:pPr>
+            <a:r>
+              <a:rPr b="0" sz="1900">
+                <a:solidFill>
+                  <a:srgbClr val="37352F"/>
+                </a:solidFill>
+              </a:rPr>
+              <a:t>la paz que Dios me regaló,_x000D_</a:t>
+            </a:r>
+          </a:p>
+          <a:p>
+            <a:pPr>
+              <a:lnSpc>
+                <a:spcPct val="105000"/>
+              </a:lnSpc>
+            </a:pPr>
+            <a:r>
+              <a:rPr b="0" sz="1900">
+                <a:solidFill>
+                  <a:srgbClr val="37352F"/>
+                </a:solidFill>
+              </a:rPr>
+              <a:t>y en un abrazo a ti te entrego_x000D_</a:t>
+            </a:r>
+          </a:p>
+          <a:p>
+            <a:pPr>
+              <a:lnSpc>
+                <a:spcPct val="105000"/>
+              </a:lnSpc>
+            </a:pPr>
+            <a:r>
+              <a:rPr b="0" sz="1900">
+                <a:solidFill>
+                  <a:srgbClr val="37352F"/>
+                </a:solidFill>
+              </a:rPr>
+              <a:t>la paz que llevo en mi corazón. (BIS)_x000D_</a:t>
             </a:r>
           </a:p>
           <a:p>
@@ -8325,37 +9623,81 @@
               </a:lnSpc>
             </a:pPr>
             <a:r>
-              <a:rPr b="0" sz="1900">
-                <a:solidFill>
-                  <a:srgbClr val="37352F"/>
-                </a:solidFill>
-              </a:rPr>
-              <a:t>Tú que vives y reinas por los siglos de los siglos. Amén.</a:t>
-            </a:r>
-          </a:p>
-          <a:p>
-            <a:pPr>
-              <a:spcBef>
-                <a:spcPts val="0"/>
-              </a:spcBef>
-              <a:spcAft>
-                <a:spcPts val="0"/>
-              </a:spcAft>
-            </a:pPr>
-          </a:p>
-          <a:p>
-            <a:pPr>
-              <a:lnSpc>
-                <a:spcPct val="105000"/>
-              </a:lnSpc>
-            </a:pPr>
-            <a:r>
-              <a:rPr b="0" sz="1900">
-                <a:solidFill>
-                  <a:srgbClr val="37352F"/>
-                </a:solidFill>
-              </a:rPr>
-              <a:t>La paz del Señor esté siempre con vosotros.</a:t>
+              <a:rPr b="1" sz="1900">
+                <a:solidFill>
+                  <a:srgbClr val="37352F"/>
+                </a:solidFill>
+              </a:rPr>
+              <a:t>Recíbela, recíbela,</a:t>
+            </a:r>
+            <a:r>
+              <a:rPr b="0" sz="1900">
+                <a:solidFill>
+                  <a:srgbClr val="37352F"/>
+                </a:solidFill>
+              </a:rPr>
+              <a:t>_x000D_</a:t>
+            </a:r>
+          </a:p>
+          <a:p>
+            <a:pPr>
+              <a:lnSpc>
+                <a:spcPct val="105000"/>
+              </a:lnSpc>
+            </a:pPr>
+            <a:r>
+              <a:rPr b="1" sz="1900">
+                <a:solidFill>
+                  <a:srgbClr val="37352F"/>
+                </a:solidFill>
+              </a:rPr>
+              <a:t>esta es la paz</a:t>
+            </a:r>
+            <a:r>
+              <a:rPr b="0" sz="1900">
+                <a:solidFill>
+                  <a:srgbClr val="37352F"/>
+                </a:solidFill>
+              </a:rPr>
+              <a:t>_x000D_</a:t>
+            </a:r>
+          </a:p>
+          <a:p>
+            <a:pPr>
+              <a:lnSpc>
+                <a:spcPct val="105000"/>
+              </a:lnSpc>
+            </a:pPr>
+            <a:r>
+              <a:rPr b="1" sz="1900">
+                <a:solidFill>
+                  <a:srgbClr val="37352F"/>
+                </a:solidFill>
+              </a:rPr>
+              <a:t>que el mundo no te puede dar.</a:t>
+            </a:r>
+            <a:r>
+              <a:rPr b="0" sz="1900">
+                <a:solidFill>
+                  <a:srgbClr val="37352F"/>
+                </a:solidFill>
+              </a:rPr>
+              <a:t>_x000D_</a:t>
+            </a:r>
+          </a:p>
+          <a:p>
+            <a:pPr>
+              <a:lnSpc>
+                <a:spcPct val="105000"/>
+              </a:lnSpc>
+            </a:pPr>
+            <a:r>
+              <a:rPr b="1" sz="1900">
+                <a:solidFill>
+                  <a:srgbClr val="37352F"/>
+                </a:solidFill>
+              </a:rPr>
+              <a:t>(BIS)</a:t>
             </a:r>
           </a:p>
         </p:txBody>
@@ -8716,9 +10058,33 @@
           </a:prstGeom>
         </p:spPr>
       </p:pic>
-      <p:sp>
-        <p:nvSpPr>
-          <p:cNvPr id="4" name="Rounded Rectangle 3"/>
+      <p:pic>
+        <p:nvPicPr>
+          <p:cNvPr id="4" name="Picture 3" descr="fano_20140959_el_que_come_este_pan_vivirá_para_siempre.jpg"/>
+          <p:cNvPicPr>
+            <a:picLocks noChangeAspect="1"/>
+          </p:cNvPicPr>
+          <p:nvPr/>
+        </p:nvPicPr>
+        <p:blipFill>
+          <a:blip r:embed="rId3"/>
+          <a:stretch>
+            <a:fillRect/>
+          </a:stretch>
+        </p:blipFill>
+        <p:spPr>
+          <a:xfrm>
+            <a:off x="6675120" y="1005840"/>
+            <a:ext cx="2991028" cy="2560320"/>
+          </a:xfrm>
+          <a:prstGeom prst="rect">
+            <a:avLst/>
+          </a:prstGeom>
+        </p:spPr>
+      </p:pic>
+      <p:sp>
+        <p:nvSpPr>
+          <p:cNvPr id="5" name="Rounded Rectangle 4"/>
           <p:cNvSpPr/>
           <p:nvPr/>
         </p:nvSpPr>
@@ -8765,7 +10131,7 @@
       </p:sp>
       <p:sp>
         <p:nvSpPr>
-          <p:cNvPr id="5" name="Rectangle 4"/>
+          <p:cNvPr id="6" name="Rectangle 5"/>
           <p:cNvSpPr/>
           <p:nvPr/>
         </p:nvSpPr>
@@ -8808,7 +10174,7 @@
       </p:sp>
       <p:sp>
         <p:nvSpPr>
-          <p:cNvPr id="6" name="TextBox 5"/>
+          <p:cNvPr id="7" name="TextBox 6"/>
           <p:cNvSpPr txBox="1"/>
           <p:nvPr/>
         </p:nvSpPr>
@@ -8832,7 +10198,7 @@
                   <a:srgbClr val="7C3AED"/>
                 </a:solidFill>
               </a:rPr>
-              <a:t>MARÍA, MÚSICA DE DIOS</a:t>
+              <a:t>EL SEÑOR ES MI PASTOR</a:t>
             </a:r>
           </a:p>
           <a:p>
@@ -8857,307 +10223,412 @@
                   <a:srgbClr val="37352F"/>
                 </a:solidFill>
               </a:rPr>
-              <a:t>MARÍA, MÚSICA DE DIOS</a:t>
-            </a:r>
-          </a:p>
-          <a:p>
-            <a:pPr>
-              <a:lnSpc>
-                <a:spcPct val="105000"/>
-              </a:lnSpc>
-            </a:pPr>
-            <a:r>
-              <a:rPr b="0" sz="1900">
-                <a:solidFill>
-                  <a:srgbClr val="37352F"/>
-                </a:solidFill>
-              </a:rPr>
-              <a:t>Me quedé sin voz con qué cantar</a:t>
-            </a:r>
-          </a:p>
-          <a:p>
-            <a:pPr>
-              <a:lnSpc>
-                <a:spcPct val="105000"/>
-              </a:lnSpc>
-            </a:pPr>
-            <a:r>
-              <a:rPr b="0" sz="1900">
-                <a:solidFill>
-                  <a:srgbClr val="37352F"/>
-                </a:solidFill>
-              </a:rPr>
-              <a:t>y mi alma vacía dormía en sequedad</a:t>
-            </a:r>
-          </a:p>
-          <a:p>
-            <a:pPr>
-              <a:lnSpc>
-                <a:spcPct val="105000"/>
-              </a:lnSpc>
-            </a:pPr>
-            <a:r>
-              <a:rPr b="0" sz="1900">
-                <a:solidFill>
-                  <a:srgbClr val="37352F"/>
-                </a:solidFill>
-              </a:rPr>
-              <a:t>Y pensé para mí: me pondré en sus manos</a:t>
-            </a:r>
-          </a:p>
-          <a:p>
-            <a:pPr>
-              <a:lnSpc>
-                <a:spcPct val="105000"/>
-              </a:lnSpc>
-            </a:pPr>
-            <a:r>
-              <a:rPr b="0" sz="1900">
-                <a:solidFill>
-                  <a:srgbClr val="37352F"/>
-                </a:solidFill>
-              </a:rPr>
-              <a:t>manos de Madre, me dejaré en su amor</a:t>
-            </a:r>
-          </a:p>
-          <a:p>
-            <a:pPr>
-              <a:lnSpc>
-                <a:spcPct val="105000"/>
-              </a:lnSpc>
-            </a:pPr>
-            <a:r>
-              <a:rPr b="0" sz="1900">
-                <a:solidFill>
-                  <a:srgbClr val="37352F"/>
-                </a:solidFill>
-              </a:rPr>
-              <a:t>Y tú, María, házme música de Dios</a:t>
-            </a:r>
-          </a:p>
-          <a:p>
-            <a:pPr>
-              <a:lnSpc>
-                <a:spcPct val="105000"/>
-              </a:lnSpc>
-            </a:pPr>
-            <a:r>
-              <a:rPr b="0" sz="1900">
-                <a:solidFill>
-                  <a:srgbClr val="37352F"/>
-                </a:solidFill>
-              </a:rPr>
-              <a:t>Y tú, María, anima tú las cuerdas de mi alma</a:t>
-            </a:r>
-          </a:p>
-          <a:p>
-            <a:pPr>
-              <a:lnSpc>
-                <a:spcPct val="105000"/>
-              </a:lnSpc>
-            </a:pPr>
-            <a:r>
-              <a:rPr b="0" sz="1900">
-                <a:solidFill>
-                  <a:srgbClr val="37352F"/>
-                </a:solidFill>
-              </a:rPr>
-              <a:t>Aleluya, Amén</a:t>
-            </a:r>
-          </a:p>
-          <a:p>
-            <a:pPr>
-              <a:lnSpc>
-                <a:spcPct val="105000"/>
-              </a:lnSpc>
-            </a:pPr>
-            <a:r>
-              <a:rPr b="0" sz="1900">
-                <a:solidFill>
-                  <a:srgbClr val="37352F"/>
-                </a:solidFill>
-              </a:rPr>
-              <a:t>Y tú, María, házme música de Dios</a:t>
-            </a:r>
-          </a:p>
-          <a:p>
-            <a:pPr>
-              <a:lnSpc>
-                <a:spcPct val="105000"/>
-              </a:lnSpc>
-            </a:pPr>
-            <a:r>
-              <a:rPr b="0" sz="1900">
-                <a:solidFill>
-                  <a:srgbClr val="37352F"/>
-                </a:solidFill>
-              </a:rPr>
-              <a:t>Y tú, María, anima tú las cuerdas de mi alma</a:t>
-            </a:r>
-          </a:p>
-          <a:p>
-            <a:pPr>
-              <a:lnSpc>
-                <a:spcPct val="105000"/>
-              </a:lnSpc>
-            </a:pPr>
-            <a:r>
-              <a:rPr b="0" sz="1900">
-                <a:solidFill>
-                  <a:srgbClr val="37352F"/>
-                </a:solidFill>
-              </a:rPr>
-              <a:t>Aleluya, Amén</a:t>
-            </a:r>
-          </a:p>
-          <a:p>
-            <a:pPr>
-              <a:lnSpc>
-                <a:spcPct val="105000"/>
-              </a:lnSpc>
-            </a:pPr>
-            <a:r>
-              <a:rPr b="0" sz="1900">
-                <a:solidFill>
-                  <a:srgbClr val="37352F"/>
-                </a:solidFill>
-              </a:rPr>
-              <a:t>María, acompaña tú mi caminar</a:t>
-            </a:r>
-          </a:p>
-          <a:p>
-            <a:pPr>
-              <a:lnSpc>
-                <a:spcPct val="105000"/>
-              </a:lnSpc>
-            </a:pPr>
-            <a:r>
-              <a:rPr b="0" sz="1900">
-                <a:solidFill>
-                  <a:srgbClr val="37352F"/>
-                </a:solidFill>
-              </a:rPr>
-              <a:t>yo sola no puedo, ayúdame a andar</a:t>
-            </a:r>
-          </a:p>
-          <a:p>
-            <a:pPr>
-              <a:lnSpc>
-                <a:spcPct val="105000"/>
-              </a:lnSpc>
-            </a:pPr>
-            <a:r>
-              <a:rPr b="0" sz="1900">
-                <a:solidFill>
-                  <a:srgbClr val="37352F"/>
-                </a:solidFill>
-              </a:rPr>
-              <a:t>Y pensé para mí: me pondré en sus manos</a:t>
-            </a:r>
-          </a:p>
-          <a:p>
-            <a:pPr>
-              <a:lnSpc>
-                <a:spcPct val="105000"/>
-              </a:lnSpc>
-            </a:pPr>
-            <a:r>
-              <a:rPr b="0" sz="1900">
-                <a:solidFill>
-                  <a:srgbClr val="37352F"/>
-                </a:solidFill>
-              </a:rPr>
-              <a:t>manos de Madre, me dejaré en su amor</a:t>
-            </a:r>
-          </a:p>
-          <a:p>
-            <a:pPr>
-              <a:lnSpc>
-                <a:spcPct val="105000"/>
-              </a:lnSpc>
-            </a:pPr>
-            <a:r>
-              <a:rPr b="0" sz="1900">
-                <a:solidFill>
-                  <a:srgbClr val="37352F"/>
-                </a:solidFill>
-              </a:rPr>
-              <a:t>Y tú, María, házme música de Dios</a:t>
-            </a:r>
-          </a:p>
-          <a:p>
-            <a:pPr>
-              <a:lnSpc>
-                <a:spcPct val="105000"/>
-              </a:lnSpc>
-            </a:pPr>
-            <a:r>
-              <a:rPr b="0" sz="1900">
-                <a:solidFill>
-                  <a:srgbClr val="37352F"/>
-                </a:solidFill>
-              </a:rPr>
-              <a:t>Y tú, María, anima tú las cuerdas de mi alma</a:t>
-            </a:r>
-          </a:p>
-          <a:p>
-            <a:pPr>
-              <a:lnSpc>
-                <a:spcPct val="105000"/>
-              </a:lnSpc>
-            </a:pPr>
-            <a:r>
-              <a:rPr b="0" sz="1900">
-                <a:solidFill>
-                  <a:srgbClr val="37352F"/>
-                </a:solidFill>
-              </a:rPr>
-              <a:t>Aleluya, Amén</a:t>
-            </a:r>
-          </a:p>
-          <a:p>
-            <a:pPr>
-              <a:lnSpc>
-                <a:spcPct val="105000"/>
-              </a:lnSpc>
-            </a:pPr>
-            <a:r>
-              <a:rPr b="0" sz="1900">
-                <a:solidFill>
-                  <a:srgbClr val="37352F"/>
-                </a:solidFill>
-              </a:rPr>
-              <a:t>Y tú, María, házme música de Dios</a:t>
-            </a:r>
-          </a:p>
-          <a:p>
-            <a:pPr>
-              <a:lnSpc>
-                <a:spcPct val="105000"/>
-              </a:lnSpc>
-            </a:pPr>
-            <a:r>
-              <a:rPr b="0" sz="1900">
-                <a:solidFill>
-                  <a:srgbClr val="37352F"/>
-                </a:solidFill>
-              </a:rPr>
-              <a:t>Y tú, María, anima tú las cuerdas de mi alma</a:t>
-            </a:r>
-          </a:p>
-          <a:p>
-            <a:pPr>
-              <a:lnSpc>
-                <a:spcPct val="105000"/>
-              </a:lnSpc>
-            </a:pPr>
-            <a:r>
-              <a:rPr b="0" sz="1900">
-                <a:solidFill>
-                  <a:srgbClr val="37352F"/>
-                </a:solidFill>
-              </a:rPr>
-              <a:t>Aleluya, Amén</a:t>
+              <a:t>EL SEÑOR ES MI PASTOR NADA ME FALTA</a:t>
+            </a:r>
+          </a:p>
+          <a:p>
+            <a:pPr>
+              <a:lnSpc>
+                <a:spcPct val="105000"/>
+              </a:lnSpc>
+            </a:pPr>
+            <a:r>
+              <a:rPr b="0" sz="1900">
+                <a:solidFill>
+                  <a:srgbClr val="37352F"/>
+                </a:solidFill>
+              </a:rPr>
+              <a:t>EL SEÑOR ES MI PASTOR.</a:t>
+            </a:r>
+          </a:p>
+          <a:p>
+            <a:pPr>
+              <a:lnSpc>
+                <a:spcPct val="105000"/>
+              </a:lnSpc>
+            </a:pPr>
+            <a:r>
+              <a:rPr b="0" sz="1900">
+                <a:solidFill>
+                  <a:srgbClr val="37352F"/>
+                </a:solidFill>
+              </a:rPr>
+              <a:t>EL SEÑOR ES MI PASTOR NADA ME FALTA</a:t>
+            </a:r>
+          </a:p>
+          <a:p>
+            <a:pPr>
+              <a:lnSpc>
+                <a:spcPct val="105000"/>
+              </a:lnSpc>
+            </a:pPr>
+            <a:r>
+              <a:rPr b="0" sz="1900">
+                <a:solidFill>
+                  <a:srgbClr val="37352F"/>
+                </a:solidFill>
+              </a:rPr>
+              <a:t>EL SEÑOR ES MI PASTOR.</a:t>
+            </a:r>
+          </a:p>
+          <a:p>
+            <a:pPr>
+              <a:lnSpc>
+                <a:spcPct val="105000"/>
+              </a:lnSpc>
+            </a:pPr>
+            <a:r>
+              <a:rPr b="0" sz="1900">
+                <a:solidFill>
+                  <a:srgbClr val="37352F"/>
+                </a:solidFill>
+              </a:rPr>
+              <a:t>En praderas reposa mi alma,</a:t>
+            </a:r>
+          </a:p>
+          <a:p>
+            <a:pPr>
+              <a:lnSpc>
+                <a:spcPct val="105000"/>
+              </a:lnSpc>
+            </a:pPr>
+            <a:r>
+              <a:rPr b="0" sz="1900">
+                <a:solidFill>
+                  <a:srgbClr val="37352F"/>
+                </a:solidFill>
+              </a:rPr>
+              <a:t>en su agua descansa mi sed.</a:t>
+            </a:r>
+          </a:p>
+          <a:p>
+            <a:pPr>
+              <a:lnSpc>
+                <a:spcPct val="105000"/>
+              </a:lnSpc>
+            </a:pPr>
+            <a:r>
+              <a:rPr b="0" sz="1900">
+                <a:solidFill>
+                  <a:srgbClr val="37352F"/>
+                </a:solidFill>
+              </a:rPr>
+              <a:t>El me guía por senderos justos</a:t>
+            </a:r>
+          </a:p>
+          <a:p>
+            <a:pPr>
+              <a:lnSpc>
+                <a:spcPct val="105000"/>
+              </a:lnSpc>
+            </a:pPr>
+            <a:r>
+              <a:rPr b="0" sz="1900">
+                <a:solidFill>
+                  <a:srgbClr val="37352F"/>
+                </a:solidFill>
+              </a:rPr>
+              <a:t>por amor, por amor de su nombre.</a:t>
+            </a:r>
+          </a:p>
+          <a:p>
+            <a:pPr>
+              <a:lnSpc>
+                <a:spcPct val="105000"/>
+              </a:lnSpc>
+            </a:pPr>
+            <a:r>
+              <a:rPr b="0" sz="1900">
+                <a:solidFill>
+                  <a:srgbClr val="37352F"/>
+                </a:solidFill>
+              </a:rPr>
+              <a:t>Aunque pase por valles oscuros</a:t>
+            </a:r>
+          </a:p>
+          <a:p>
+            <a:pPr>
+              <a:lnSpc>
+                <a:spcPct val="105000"/>
+              </a:lnSpc>
+            </a:pPr>
+            <a:r>
+              <a:rPr b="0" sz="1900">
+                <a:solidFill>
+                  <a:srgbClr val="37352F"/>
+                </a:solidFill>
+              </a:rPr>
+              <a:t>ningún mal, ningún mal temeré</a:t>
+            </a:r>
+          </a:p>
+          <a:p>
+            <a:pPr>
+              <a:lnSpc>
+                <a:spcPct val="105000"/>
+              </a:lnSpc>
+            </a:pPr>
+            <a:r>
+              <a:rPr b="0" sz="1900">
+                <a:solidFill>
+                  <a:srgbClr val="37352F"/>
+                </a:solidFill>
+              </a:rPr>
+              <a:t>porque se que el Señor va conmigo</a:t>
+            </a:r>
+          </a:p>
+          <a:p>
+            <a:pPr>
+              <a:lnSpc>
+                <a:spcPct val="105000"/>
+              </a:lnSpc>
+            </a:pPr>
+            <a:r>
+              <a:rPr b="0" sz="1900">
+                <a:solidFill>
+                  <a:srgbClr val="37352F"/>
+                </a:solidFill>
+              </a:rPr>
+              <a:t>su cayado sostiene mi fe.</a:t>
+            </a:r>
+          </a:p>
+          <a:p>
+            <a:pPr>
+              <a:lnSpc>
+                <a:spcPct val="105000"/>
+              </a:lnSpc>
+            </a:pPr>
+            <a:r>
+              <a:rPr b="0" sz="1900">
+                <a:solidFill>
+                  <a:srgbClr val="37352F"/>
+                </a:solidFill>
+              </a:rPr>
+              <a:t>EL SEÑOR ES MI PASTOR NADA ME FALTA</a:t>
+            </a:r>
+          </a:p>
+          <a:p>
+            <a:pPr>
+              <a:lnSpc>
+                <a:spcPct val="105000"/>
+              </a:lnSpc>
+            </a:pPr>
+            <a:r>
+              <a:rPr b="0" sz="1900">
+                <a:solidFill>
+                  <a:srgbClr val="37352F"/>
+                </a:solidFill>
+              </a:rPr>
+              <a:t>EL SEÑOR ES MI PASTOR.</a:t>
+            </a:r>
+          </a:p>
+          <a:p>
+            <a:pPr>
+              <a:lnSpc>
+                <a:spcPct val="105000"/>
+              </a:lnSpc>
+            </a:pPr>
+            <a:r>
+              <a:rPr b="0" sz="1900">
+                <a:solidFill>
+                  <a:srgbClr val="37352F"/>
+                </a:solidFill>
+              </a:rPr>
+              <a:t>EL SEÑOR ES MI PASTOR NADA ME FALTA</a:t>
+            </a:r>
+          </a:p>
+          <a:p>
+            <a:pPr>
+              <a:lnSpc>
+                <a:spcPct val="105000"/>
+              </a:lnSpc>
+            </a:pPr>
+            <a:r>
+              <a:rPr b="0" sz="1900">
+                <a:solidFill>
+                  <a:srgbClr val="37352F"/>
+                </a:solidFill>
+              </a:rPr>
+              <a:t>EL SEÑOR ES MI PASTOR.</a:t>
+            </a:r>
+          </a:p>
+          <a:p>
+            <a:pPr>
+              <a:lnSpc>
+                <a:spcPct val="105000"/>
+              </a:lnSpc>
+            </a:pPr>
+            <a:r>
+              <a:rPr b="0" sz="1900">
+                <a:solidFill>
+                  <a:srgbClr val="37352F"/>
+                </a:solidFill>
+              </a:rPr>
+              <a:t>Tu preparas por mi una mesa</a:t>
+            </a:r>
+          </a:p>
+          <a:p>
+            <a:pPr>
+              <a:lnSpc>
+                <a:spcPct val="105000"/>
+              </a:lnSpc>
+            </a:pPr>
+            <a:r>
+              <a:rPr b="0" sz="1900">
+                <a:solidFill>
+                  <a:srgbClr val="37352F"/>
+                </a:solidFill>
+              </a:rPr>
+              <a:t>frente a aquellos que buscan mi mal.</a:t>
+            </a:r>
+          </a:p>
+          <a:p>
+            <a:pPr>
+              <a:lnSpc>
+                <a:spcPct val="105000"/>
+              </a:lnSpc>
+            </a:pPr>
+            <a:r>
+              <a:rPr b="0" sz="1900">
+                <a:solidFill>
+                  <a:srgbClr val="37352F"/>
+                </a:solidFill>
+              </a:rPr>
+              <a:t>Con aceite me ungiste ,Señor</a:t>
+            </a:r>
+          </a:p>
+          <a:p>
+            <a:pPr>
+              <a:lnSpc>
+                <a:spcPct val="105000"/>
+              </a:lnSpc>
+            </a:pPr>
+            <a:r>
+              <a:rPr b="0" sz="1900">
+                <a:solidFill>
+                  <a:srgbClr val="37352F"/>
+                </a:solidFill>
+              </a:rPr>
+              <a:t>y mi copa rebosa de ti.</a:t>
+            </a:r>
+          </a:p>
+          <a:p>
+            <a:pPr>
+              <a:lnSpc>
+                <a:spcPct val="105000"/>
+              </a:lnSpc>
+            </a:pPr>
+            <a:r>
+              <a:rPr b="0" sz="1900">
+                <a:solidFill>
+                  <a:srgbClr val="37352F"/>
+                </a:solidFill>
+              </a:rPr>
+              <a:t>Gloria a Dios, padre omnipotente</a:t>
+            </a:r>
+          </a:p>
+          <a:p>
+            <a:pPr>
+              <a:lnSpc>
+                <a:spcPct val="105000"/>
+              </a:lnSpc>
+            </a:pPr>
+            <a:r>
+              <a:rPr b="0" sz="1900">
+                <a:solidFill>
+                  <a:srgbClr val="37352F"/>
+                </a:solidFill>
+              </a:rPr>
+              <a:t>y a su hijo Jesús, el Señor</a:t>
+            </a:r>
+          </a:p>
+          <a:p>
+            <a:pPr>
+              <a:lnSpc>
+                <a:spcPct val="105000"/>
+              </a:lnSpc>
+            </a:pPr>
+            <a:r>
+              <a:rPr b="0" sz="1900">
+                <a:solidFill>
+                  <a:srgbClr val="37352F"/>
+                </a:solidFill>
+              </a:rPr>
+              <a:t>y al Espíritu que habita en el mundo</a:t>
+            </a:r>
+          </a:p>
+          <a:p>
+            <a:pPr>
+              <a:lnSpc>
+                <a:spcPct val="105000"/>
+              </a:lnSpc>
+            </a:pPr>
+            <a:r>
+              <a:rPr b="0" sz="1900">
+                <a:solidFill>
+                  <a:srgbClr val="37352F"/>
+                </a:solidFill>
+              </a:rPr>
+              <a:t>por los siglos eternos Amen.</a:t>
+            </a:r>
+          </a:p>
+          <a:p>
+            <a:pPr>
+              <a:lnSpc>
+                <a:spcPct val="105000"/>
+              </a:lnSpc>
+            </a:pPr>
+            <a:r>
+              <a:rPr b="0" sz="1900">
+                <a:solidFill>
+                  <a:srgbClr val="37352F"/>
+                </a:solidFill>
+              </a:rPr>
+              <a:t>EL SEÑOR ES MI PASTOR NADA ME FALTA</a:t>
+            </a:r>
+          </a:p>
+          <a:p>
+            <a:pPr>
+              <a:lnSpc>
+                <a:spcPct val="105000"/>
+              </a:lnSpc>
+            </a:pPr>
+            <a:r>
+              <a:rPr b="0" sz="1900">
+                <a:solidFill>
+                  <a:srgbClr val="37352F"/>
+                </a:solidFill>
+              </a:rPr>
+              <a:t>EL SEÑOR ES MI PASTOR.</a:t>
+            </a:r>
+          </a:p>
+          <a:p>
+            <a:pPr>
+              <a:lnSpc>
+                <a:spcPct val="105000"/>
+              </a:lnSpc>
+            </a:pPr>
+            <a:r>
+              <a:rPr b="0" sz="1900">
+                <a:solidFill>
+                  <a:srgbClr val="37352F"/>
+                </a:solidFill>
+              </a:rPr>
+              <a:t>EL SEÑOR ES MI PASTOR NADA ME FALTA</a:t>
+            </a:r>
+          </a:p>
+          <a:p>
+            <a:pPr>
+              <a:lnSpc>
+                <a:spcPct val="105000"/>
+              </a:lnSpc>
+            </a:pPr>
+            <a:r>
+              <a:rPr b="0" sz="1900">
+                <a:solidFill>
+                  <a:srgbClr val="37352F"/>
+                </a:solidFill>
+              </a:rPr>
+              <a:t>EL SEÑOR ES MI PASTOR.</a:t>
             </a:r>
           </a:p>
         </p:txBody>
@@ -9520,7 +10991,7 @@
       </p:pic>
       <p:pic>
         <p:nvPicPr>
-          <p:cNvPr id="4" name="Picture 3" descr="virgen_fatima.jpg"/>
+          <p:cNvPr id="4" name="Picture 3" descr="patite_ilustracion_52a3d8fa.jpeg"/>
           <p:cNvPicPr>
             <a:picLocks noChangeAspect="1"/>
           </p:cNvPicPr>
@@ -9535,7 +11006,7 @@
         <p:spPr>
           <a:xfrm>
             <a:off x="6675120" y="1005840"/>
-            <a:ext cx="1810226" cy="2560320"/>
+            <a:ext cx="3413760" cy="2560320"/>
           </a:xfrm>
           <a:prstGeom prst="rect">
             <a:avLst/>
@@ -9658,7 +11129,7 @@
                   <a:srgbClr val="7C3AED"/>
                 </a:solidFill>
               </a:rPr>
-              <a:t>CANTO A MARÍA</a:t>
+              <a:t>A TU AMPARO Y PROTECCIÓN</a:t>
             </a:r>
           </a:p>
           <a:p>
@@ -9683,122 +11154,82 @@
                   <a:srgbClr val="37352F"/>
                 </a:solidFill>
               </a:rPr>
-              <a:t>Dios te salve, María;</a:t>
-            </a:r>
-          </a:p>
-          <a:p>
-            <a:pPr>
-              <a:lnSpc>
-                <a:spcPct val="105000"/>
-              </a:lnSpc>
-            </a:pPr>
-            <a:r>
-              <a:rPr b="0" sz="1900">
-                <a:solidFill>
-                  <a:srgbClr val="37352F"/>
-                </a:solidFill>
-              </a:rPr>
-              <a:t>llena eres de gracia;</a:t>
-            </a:r>
-          </a:p>
-          <a:p>
-            <a:pPr>
-              <a:lnSpc>
-                <a:spcPct val="105000"/>
-              </a:lnSpc>
-            </a:pPr>
-            <a:r>
-              <a:rPr b="0" sz="1900">
-                <a:solidFill>
-                  <a:srgbClr val="37352F"/>
-                </a:solidFill>
-              </a:rPr>
-              <a:t>el Señor es contigo.</a:t>
-            </a:r>
-          </a:p>
-          <a:p>
-            <a:pPr>
-              <a:lnSpc>
-                <a:spcPct val="105000"/>
-              </a:lnSpc>
-            </a:pPr>
-            <a:r>
-              <a:rPr b="0" sz="1900">
-                <a:solidFill>
-                  <a:srgbClr val="37352F"/>
-                </a:solidFill>
-              </a:rPr>
-              <a:t>Bendita tú eres entre todas las mujeres,</a:t>
-            </a:r>
-          </a:p>
-          <a:p>
-            <a:pPr>
-              <a:lnSpc>
-                <a:spcPct val="105000"/>
-              </a:lnSpc>
-            </a:pPr>
-            <a:r>
-              <a:rPr b="0" sz="1900">
-                <a:solidFill>
-                  <a:srgbClr val="37352F"/>
-                </a:solidFill>
-              </a:rPr>
-              <a:t>y bendito es el fruto de tu vientre, Jesús.</a:t>
-            </a:r>
-          </a:p>
-          <a:p>
-            <a:pPr>
-              <a:spcBef>
-                <a:spcPts val="0"/>
-              </a:spcBef>
-              <a:spcAft>
-                <a:spcPts val="0"/>
-              </a:spcAft>
-            </a:pPr>
-          </a:p>
-          <a:p>
-            <a:pPr>
-              <a:lnSpc>
-                <a:spcPct val="105000"/>
-              </a:lnSpc>
-            </a:pPr>
-            <a:r>
-              <a:rPr b="0" sz="1900">
-                <a:solidFill>
-                  <a:srgbClr val="37352F"/>
-                </a:solidFill>
-              </a:rPr>
-              <a:t>Santa María, Madre de Dios,</a:t>
-            </a:r>
-          </a:p>
-          <a:p>
-            <a:pPr>
-              <a:lnSpc>
-                <a:spcPct val="105000"/>
-              </a:lnSpc>
-            </a:pPr>
-            <a:r>
-              <a:rPr b="0" sz="1900">
-                <a:solidFill>
-                  <a:srgbClr val="37352F"/>
-                </a:solidFill>
-              </a:rPr>
-              <a:t>ruega por nosotros, pecadores,</a:t>
-            </a:r>
-          </a:p>
-          <a:p>
-            <a:pPr>
-              <a:lnSpc>
-                <a:spcPct val="105000"/>
-              </a:lnSpc>
-            </a:pPr>
-            <a:r>
-              <a:rPr b="0" sz="1900">
-                <a:solidFill>
-                  <a:srgbClr val="37352F"/>
-                </a:solidFill>
-              </a:rPr>
-              <a:t>ahora y en la hora de nuestra muerte. Amén.</a:t>
+              <a:t>A TU AMPARO Y PROTECCIÓN,_x000D_</a:t>
+            </a:r>
+          </a:p>
+          <a:p>
+            <a:pPr>
+              <a:lnSpc>
+                <a:spcPct val="105000"/>
+              </a:lnSpc>
+            </a:pPr>
+            <a:r>
+              <a:rPr b="0" sz="1900">
+                <a:solidFill>
+                  <a:srgbClr val="37352F"/>
+                </a:solidFill>
+              </a:rPr>
+              <a:t>MADRE DE DIOS, ACUDIMOS._x000D_</a:t>
+            </a:r>
+          </a:p>
+          <a:p>
+            <a:pPr>
+              <a:lnSpc>
+                <a:spcPct val="105000"/>
+              </a:lnSpc>
+            </a:pPr>
+            <a:r>
+              <a:rPr b="0" sz="1900">
+                <a:solidFill>
+                  <a:srgbClr val="37352F"/>
+                </a:solidFill>
+              </a:rPr>
+              <a:t>NO DESOIGAS NUESTROS RUEGOS_x000D_</a:t>
+            </a:r>
+          </a:p>
+          <a:p>
+            <a:pPr>
+              <a:lnSpc>
+                <a:spcPct val="105000"/>
+              </a:lnSpc>
+            </a:pPr>
+            <a:r>
+              <a:rPr b="0" sz="1900">
+                <a:solidFill>
+                  <a:srgbClr val="37352F"/>
+                </a:solidFill>
+              </a:rPr>
+              <a:t>Y DE TODOS LOS PELIGROS,_x000D_</a:t>
+            </a:r>
+          </a:p>
+          <a:p>
+            <a:pPr>
+              <a:lnSpc>
+                <a:spcPct val="105000"/>
+              </a:lnSpc>
+            </a:pPr>
+            <a:r>
+              <a:rPr b="0" sz="1900">
+                <a:solidFill>
+                  <a:srgbClr val="37352F"/>
+                </a:solidFill>
+              </a:rPr>
+              <a:t>VIRGEN GLORIOSA Y BENDITA,_x000D_</a:t>
+            </a:r>
+          </a:p>
+          <a:p>
+            <a:pPr>
+              <a:lnSpc>
+                <a:spcPct val="105000"/>
+              </a:lnSpc>
+            </a:pPr>
+            <a:r>
+              <a:rPr b="0" sz="1900">
+                <a:solidFill>
+                  <a:srgbClr val="37352F"/>
+                </a:solidFill>
+              </a:rPr>
+              <a:t>DEFIENDE SIEMPRE A TUS HIJOS</a:t>
             </a:r>
           </a:p>
         </p:txBody>
@@ -10161,7 +11592,7 @@
       </p:pic>
       <p:pic>
         <p:nvPicPr>
-          <p:cNvPr id="4" name="Picture 3" descr="20140953.jpg"/>
+          <p:cNvPr id="4" name="Picture 3" descr="fano_20140957_movidos_por_la_ola_del_espíritu.jpg"/>
           <p:cNvPicPr>
             <a:picLocks noChangeAspect="1"/>
           </p:cNvPicPr>
@@ -10176,7 +11607,7 @@
         <p:spPr>
           <a:xfrm>
             <a:off x="6675120" y="1005840"/>
-            <a:ext cx="3381657" cy="2560320"/>
+            <a:ext cx="3556955" cy="2560320"/>
           </a:xfrm>
           <a:prstGeom prst="rect">
             <a:avLst/>
@@ -10299,7 +11730,7 @@
                   <a:srgbClr val="7C3AED"/>
                 </a:solidFill>
               </a:rPr>
-              <a:t>PREPARAD EL CAMINO</a:t>
+              <a:t>COMO CORRE UN RÍO</a:t>
             </a:r>
           </a:p>
           <a:p>
@@ -10324,97 +11755,249 @@
                   <a:srgbClr val="37352F"/>
                 </a:solidFill>
               </a:rPr>
-              <a:t>PREPARAD EL CAMINO</a:t>
-            </a:r>
-          </a:p>
-          <a:p>
-            <a:pPr>
-              <a:lnSpc>
-                <a:spcPct val="105000"/>
-              </a:lnSpc>
-            </a:pPr>
-            <a:r>
-              <a:rPr b="0" sz="1900">
-                <a:solidFill>
-                  <a:srgbClr val="37352F"/>
-                </a:solidFill>
-              </a:rPr>
-              <a:t>PREPARAD EL CAMINO AL SEÑOR</a:t>
-            </a:r>
-          </a:p>
-          <a:p>
-            <a:pPr>
-              <a:lnSpc>
-                <a:spcPct val="105000"/>
-              </a:lnSpc>
-            </a:pPr>
-            <a:r>
-              <a:rPr b="0" sz="1900">
-                <a:solidFill>
-                  <a:srgbClr val="37352F"/>
-                </a:solidFill>
-              </a:rPr>
-              <a:t>Y ESCUCHAD LA PALABRA DE DIOS.(Bis)</a:t>
-            </a:r>
-          </a:p>
-          <a:p>
-            <a:pPr>
-              <a:lnSpc>
-                <a:spcPct val="105000"/>
-              </a:lnSpc>
-            </a:pPr>
-            <a:r>
-              <a:rPr b="0" sz="1900">
-                <a:solidFill>
-                  <a:srgbClr val="37352F"/>
-                </a:solidFill>
-              </a:rPr>
-              <a:t>Voz que clama en el desierto:</a:t>
-            </a:r>
-          </a:p>
-          <a:p>
-            <a:pPr>
-              <a:lnSpc>
-                <a:spcPct val="105000"/>
-              </a:lnSpc>
-            </a:pPr>
-            <a:r>
-              <a:rPr b="0" sz="1900">
-                <a:solidFill>
-                  <a:srgbClr val="37352F"/>
-                </a:solidFill>
-              </a:rPr>
-              <a:t>preparad los caminos de Dios,</a:t>
-            </a:r>
-          </a:p>
-          <a:p>
-            <a:pPr>
-              <a:lnSpc>
-                <a:spcPct val="105000"/>
-              </a:lnSpc>
-            </a:pPr>
-            <a:r>
-              <a:rPr b="0" sz="1900">
-                <a:solidFill>
-                  <a:srgbClr val="37352F"/>
-                </a:solidFill>
-              </a:rPr>
-              <a:t>desterrad la mentira por siempre,</a:t>
-            </a:r>
-          </a:p>
-          <a:p>
-            <a:pPr>
-              <a:lnSpc>
-                <a:spcPct val="105000"/>
-              </a:lnSpc>
-            </a:pPr>
-            <a:r>
-              <a:rPr b="0" sz="1900">
-                <a:solidFill>
-                  <a:srgbClr val="37352F"/>
-                </a:solidFill>
-              </a:rPr>
-              <a:t>preparad los caminos de Dios(Bis)</a:t>
+              <a:t>Como corre un río dentro de mi ser (x2)_x000D_</a:t>
+            </a:r>
+          </a:p>
+          <a:p>
+            <a:pPr>
+              <a:lnSpc>
+                <a:spcPct val="105000"/>
+              </a:lnSpc>
+            </a:pPr>
+            <a:r>
+              <a:rPr b="0" sz="1900">
+                <a:solidFill>
+                  <a:srgbClr val="37352F"/>
+                </a:solidFill>
+              </a:rPr>
+              <a:t>así yo confío en Cristo, mi Rey (x2)_x000D_</a:t>
+            </a:r>
+          </a:p>
+          <a:p>
+            <a:pPr>
+              <a:spcBef>
+                <a:spcPts val="0"/>
+              </a:spcBef>
+              <a:spcAft>
+                <a:spcPts val="0"/>
+              </a:spcAft>
+            </a:pPr>
+          </a:p>
+          <a:p>
+            <a:pPr>
+              <a:lnSpc>
+                <a:spcPct val="105000"/>
+              </a:lnSpc>
+            </a:pPr>
+            <a:r>
+              <a:rPr b="1" sz="1900">
+                <a:solidFill>
+                  <a:srgbClr val="37352F"/>
+                </a:solidFill>
+              </a:rPr>
+              <a:t>COMO UN RÍO DE AGUA VIVA,</a:t>
+            </a:r>
+            <a:r>
+              <a:rPr b="0" sz="1900">
+                <a:solidFill>
+                  <a:srgbClr val="37352F"/>
+                </a:solidFill>
+              </a:rPr>
+              <a:t>_x000D_</a:t>
+            </a:r>
+          </a:p>
+          <a:p>
+            <a:pPr>
+              <a:lnSpc>
+                <a:spcPct val="105000"/>
+              </a:lnSpc>
+            </a:pPr>
+            <a:r>
+              <a:rPr b="1" sz="1900">
+                <a:solidFill>
+                  <a:srgbClr val="37352F"/>
+                </a:solidFill>
+              </a:rPr>
+              <a:t>QUE SALTA P’ARRIBA, QUE LLEVO DENTRO</a:t>
+            </a:r>
+            <a:r>
+              <a:rPr b="0" sz="1900">
+                <a:solidFill>
+                  <a:srgbClr val="37352F"/>
+                </a:solidFill>
+              </a:rPr>
+              <a:t>_x000D_</a:t>
+            </a:r>
+          </a:p>
+          <a:p>
+            <a:pPr>
+              <a:lnSpc>
+                <a:spcPct val="105000"/>
+              </a:lnSpc>
+            </a:pPr>
+            <a:r>
+              <a:rPr b="1" sz="1900">
+                <a:solidFill>
+                  <a:srgbClr val="37352F"/>
+                </a:solidFill>
+              </a:rPr>
+              <a:t>QUE AFIRMA Y CONFIRMA EN ESTE MOMENTO</a:t>
+            </a:r>
+            <a:r>
+              <a:rPr b="0" sz="1900">
+                <a:solidFill>
+                  <a:srgbClr val="37352F"/>
+                </a:solidFill>
+              </a:rPr>
+              <a:t>_x000D_</a:t>
+            </a:r>
+          </a:p>
+          <a:p>
+            <a:pPr>
+              <a:lnSpc>
+                <a:spcPct val="105000"/>
+              </a:lnSpc>
+            </a:pPr>
+            <a:r>
+              <a:rPr b="1" sz="1900">
+                <a:solidFill>
+                  <a:srgbClr val="37352F"/>
+                </a:solidFill>
+              </a:rPr>
+              <a:t>EL ESPÍRITU SANTO ESTÁ VINIENDO (X2)</a:t>
+            </a:r>
+            <a:r>
+              <a:rPr b="0" sz="1900">
+                <a:solidFill>
+                  <a:srgbClr val="37352F"/>
+                </a:solidFill>
+              </a:rPr>
+              <a:t>_x000D_</a:t>
+            </a:r>
+          </a:p>
+          <a:p>
+            <a:pPr>
+              <a:spcBef>
+                <a:spcPts val="0"/>
+              </a:spcBef>
+              <a:spcAft>
+                <a:spcPts val="0"/>
+              </a:spcAft>
+            </a:pPr>
+          </a:p>
+          <a:p>
+            <a:pPr>
+              <a:lnSpc>
+                <a:spcPct val="105000"/>
+              </a:lnSpc>
+            </a:pPr>
+            <a:r>
+              <a:rPr b="0" sz="1900">
+                <a:solidFill>
+                  <a:srgbClr val="37352F"/>
+                </a:solidFill>
+              </a:rPr>
+              <a:t> Jesús está pasando por ahí_x000D_</a:t>
+            </a:r>
+          </a:p>
+          <a:p>
+            <a:pPr>
+              <a:lnSpc>
+                <a:spcPct val="105000"/>
+              </a:lnSpc>
+            </a:pPr>
+            <a:r>
+              <a:rPr b="0" sz="1900">
+                <a:solidFill>
+                  <a:srgbClr val="37352F"/>
+                </a:solidFill>
+              </a:rPr>
+              <a:t>Jesús está pasando por ahí_x000D_</a:t>
+            </a:r>
+          </a:p>
+          <a:p>
+            <a:pPr>
+              <a:lnSpc>
+                <a:spcPct val="105000"/>
+              </a:lnSpc>
+            </a:pPr>
+            <a:r>
+              <a:rPr b="0" sz="1900">
+                <a:solidFill>
+                  <a:srgbClr val="37352F"/>
+                </a:solidFill>
+              </a:rPr>
+              <a:t>Y cuando pasa todo lo transforma_x000D_</a:t>
+            </a:r>
+          </a:p>
+          <a:p>
+            <a:pPr>
+              <a:lnSpc>
+                <a:spcPct val="105000"/>
+              </a:lnSpc>
+            </a:pPr>
+            <a:r>
+              <a:rPr b="0" sz="1900">
+                <a:solidFill>
+                  <a:srgbClr val="37352F"/>
+                </a:solidFill>
+              </a:rPr>
+              <a:t>Se va la tristeza, viene la alegría_x000D_</a:t>
+            </a:r>
+          </a:p>
+          <a:p>
+            <a:pPr>
+              <a:lnSpc>
+                <a:spcPct val="105000"/>
+              </a:lnSpc>
+            </a:pPr>
+            <a:r>
+              <a:rPr b="0" sz="1900">
+                <a:solidFill>
+                  <a:srgbClr val="37352F"/>
+                </a:solidFill>
+              </a:rPr>
+              <a:t>Y cuando pasa todo lo transforma_x000D_</a:t>
+            </a:r>
+          </a:p>
+          <a:p>
+            <a:pPr>
+              <a:lnSpc>
+                <a:spcPct val="105000"/>
+              </a:lnSpc>
+            </a:pPr>
+            <a:r>
+              <a:rPr b="0" sz="1900">
+                <a:solidFill>
+                  <a:srgbClr val="37352F"/>
+                </a:solidFill>
+              </a:rPr>
+              <a:t>Viene la alegría para ti y para mí_x000D_</a:t>
+            </a:r>
+          </a:p>
+          <a:p>
+            <a:pPr>
+              <a:spcBef>
+                <a:spcPts val="0"/>
+              </a:spcBef>
+              <a:spcAft>
+                <a:spcPts val="0"/>
+              </a:spcAft>
+            </a:pPr>
+          </a:p>
+          <a:p>
+            <a:pPr>
+              <a:lnSpc>
+                <a:spcPct val="105000"/>
+              </a:lnSpc>
+            </a:pPr>
+            <a:r>
+              <a:rPr b="1" sz="1900">
+                <a:solidFill>
+                  <a:srgbClr val="37352F"/>
+                </a:solidFill>
+              </a:rPr>
+              <a:t>COMO UN RÍO DE AGUA VIVA… (X2)</a:t>
             </a:r>
           </a:p>
         </p:txBody>
@@ -11796,7 +13379,7 @@
                   <a:srgbClr val="7C3AED"/>
                 </a:solidFill>
               </a:rPr>
-              <a:t>GLORIA A DIOS (1/2)</a:t>
+              <a:t>GLORIA TE DAMOS GRACIAS, SEÑOR (R. CARISMÁTICA)</a:t>
             </a:r>
           </a:p>
           <a:p>
@@ -11821,82 +13404,7 @@
                   <a:srgbClr val="37352F"/>
                 </a:solidFill>
               </a:rPr>
-              <a:t>Te damos gracias, Señor,_x000D_</a:t>
-            </a:r>
-          </a:p>
-          <a:p>
-            <a:pPr>
-              <a:lnSpc>
-                <a:spcPct val="105000"/>
-              </a:lnSpc>
-            </a:pPr>
-            <a:r>
-              <a:rPr b="0" sz="1900">
-                <a:solidFill>
-                  <a:srgbClr val="37352F"/>
-                </a:solidFill>
-              </a:rPr>
-              <a:t>por la tierra y el sol_x000D_</a:t>
-            </a:r>
-          </a:p>
-          <a:p>
-            <a:pPr>
-              <a:lnSpc>
-                <a:spcPct val="105000"/>
-              </a:lnSpc>
-            </a:pPr>
-            <a:r>
-              <a:rPr b="0" sz="1900">
-                <a:solidFill>
-                  <a:srgbClr val="37352F"/>
-                </a:solidFill>
-              </a:rPr>
-              <a:t>por la luna y las estrellas;_x000D_</a:t>
-            </a:r>
-          </a:p>
-          <a:p>
-            <a:pPr>
-              <a:lnSpc>
-                <a:spcPct val="105000"/>
-              </a:lnSpc>
-            </a:pPr>
-            <a:r>
-              <a:rPr b="0" sz="1900">
-                <a:solidFill>
-                  <a:srgbClr val="37352F"/>
-                </a:solidFill>
-              </a:rPr>
-              <a:t>bendecimos tu nombre_x000D_</a:t>
-            </a:r>
-          </a:p>
-          <a:p>
-            <a:pPr>
-              <a:lnSpc>
-                <a:spcPct val="105000"/>
-              </a:lnSpc>
-            </a:pPr>
-            <a:r>
-              <a:rPr b="0" sz="1900">
-                <a:solidFill>
-                  <a:srgbClr val="37352F"/>
-                </a:solidFill>
-              </a:rPr>
-              <a:t>alzando las manos,_x000D_</a:t>
-            </a:r>
-          </a:p>
-          <a:p>
-            <a:pPr>
-              <a:lnSpc>
-                <a:spcPct val="105000"/>
-              </a:lnSpc>
-            </a:pPr>
-            <a:r>
-              <a:rPr b="0" sz="1900">
-                <a:solidFill>
-                  <a:srgbClr val="37352F"/>
-                </a:solidFill>
-              </a:rPr>
-              <a:t>cantando para Ti, Señor._x000D_</a:t>
+              <a:t>GLORIA TE DAMOS GRACIAS SEÑOR (R. CARISMÁTICA)</a:t>
             </a:r>
           </a:p>
           <a:p>
@@ -11921,82 +13429,22 @@
                   <a:srgbClr val="37352F"/>
                 </a:solidFill>
               </a:rPr>
-              <a:t>Te damos gracias, Jesús,_x000D_</a:t>
-            </a:r>
-          </a:p>
-          <a:p>
-            <a:pPr>
-              <a:lnSpc>
-                <a:spcPct val="105000"/>
-              </a:lnSpc>
-            </a:pPr>
-            <a:r>
-              <a:rPr b="0" sz="1900">
-                <a:solidFill>
-                  <a:srgbClr val="37352F"/>
-                </a:solidFill>
-              </a:rPr>
-              <a:t>por el fuego y la luz,_x000D_</a:t>
-            </a:r>
-          </a:p>
-          <a:p>
-            <a:pPr>
-              <a:lnSpc>
-                <a:spcPct val="105000"/>
-              </a:lnSpc>
-            </a:pPr>
-            <a:r>
-              <a:rPr b="0" sz="1900">
-                <a:solidFill>
-                  <a:srgbClr val="37352F"/>
-                </a:solidFill>
-              </a:rPr>
-              <a:t>por la noche y por el día;_x000D_</a:t>
-            </a:r>
-          </a:p>
-          <a:p>
-            <a:pPr>
-              <a:lnSpc>
-                <a:spcPct val="105000"/>
-              </a:lnSpc>
-            </a:pPr>
-            <a:r>
-              <a:rPr b="0" sz="1900">
-                <a:solidFill>
-                  <a:srgbClr val="37352F"/>
-                </a:solidFill>
-              </a:rPr>
-              <a:t>bendecimos tu nombre_x000D_</a:t>
-            </a:r>
-          </a:p>
-          <a:p>
-            <a:pPr>
-              <a:lnSpc>
-                <a:spcPct val="105000"/>
-              </a:lnSpc>
-            </a:pPr>
-            <a:r>
-              <a:rPr b="0" sz="1900">
-                <a:solidFill>
-                  <a:srgbClr val="37352F"/>
-                </a:solidFill>
-              </a:rPr>
-              <a:t>alzando las manos,_x000D_</a:t>
-            </a:r>
-          </a:p>
-          <a:p>
-            <a:pPr>
-              <a:lnSpc>
-                <a:spcPct val="105000"/>
-              </a:lnSpc>
-            </a:pPr>
-            <a:r>
-              <a:rPr b="0" sz="1900">
-                <a:solidFill>
-                  <a:srgbClr val="37352F"/>
-                </a:solidFill>
-              </a:rPr>
-              <a:t>cantando para Ti, Señor._x000D_</a:t>
+              <a:t>  Do</a:t>
+            </a:r>
+          </a:p>
+          <a:p>
+            <a:pPr>
+              <a:lnSpc>
+                <a:spcPct val="105000"/>
+              </a:lnSpc>
+            </a:pPr>
+            <a:r>
+              <a:rPr b="0" sz="1900">
+                <a:solidFill>
+                  <a:srgbClr val="37352F"/>
+                </a:solidFill>
+              </a:rPr>
+              <a:t>  Te damos gracias, Señor,</a:t>
             </a:r>
           </a:p>
           <a:p>
@@ -12011,139 +13459,882 @@
           </a:p>
           <a:p>
             <a:pPr>
-              <a:lnSpc>
-                <a:spcPct val="105000"/>
-              </a:lnSpc>
-            </a:pPr>
-            <a:r>
-              <a:rPr b="1" sz="1900">
-                <a:solidFill>
-                  <a:srgbClr val="37352F"/>
-                </a:solidFill>
-              </a:rPr>
-              <a:t>¡GLORIA A DIOS!</a:t>
-            </a:r>
-            <a:r>
-              <a:rPr b="0" sz="1900">
-                <a:solidFill>
-                  <a:srgbClr val="37352F"/>
-                </a:solidFill>
-              </a:rPr>
-              <a:t>_x000D_</a:t>
-            </a:r>
-          </a:p>
-          <a:p>
-            <a:pPr>
-              <a:lnSpc>
-                <a:spcPct val="105000"/>
-              </a:lnSpc>
-            </a:pPr>
-            <a:r>
-              <a:rPr b="0" sz="1900">
-                <a:solidFill>
-                  <a:srgbClr val="37352F"/>
-                </a:solidFill>
-              </a:rPr>
-              <a:t>(A él sea el poder),_x000D_</a:t>
-            </a:r>
-          </a:p>
-          <a:p>
-            <a:pPr>
-              <a:lnSpc>
-                <a:spcPct val="105000"/>
-              </a:lnSpc>
-            </a:pPr>
-            <a:r>
-              <a:rPr b="1" sz="1900">
-                <a:solidFill>
-                  <a:srgbClr val="37352F"/>
-                </a:solidFill>
-              </a:rPr>
-              <a:t>¡GLORIA A DIOS!</a:t>
-            </a:r>
-            <a:r>
-              <a:rPr b="0" sz="1900">
-                <a:solidFill>
-                  <a:srgbClr val="37352F"/>
-                </a:solidFill>
-              </a:rPr>
-              <a:t>_x000D_</a:t>
-            </a:r>
-          </a:p>
-          <a:p>
-            <a:pPr>
-              <a:lnSpc>
-                <a:spcPct val="105000"/>
-              </a:lnSpc>
-            </a:pPr>
-            <a:r>
-              <a:rPr b="0" sz="1900">
-                <a:solidFill>
-                  <a:srgbClr val="37352F"/>
-                </a:solidFill>
-              </a:rPr>
-              <a:t> él sea el honor)._x000D_</a:t>
-            </a:r>
-          </a:p>
-          <a:p>
-            <a:pPr>
-              <a:lnSpc>
-                <a:spcPct val="105000"/>
-              </a:lnSpc>
-            </a:pPr>
-            <a:r>
-              <a:rPr b="1" sz="1900">
-                <a:solidFill>
-                  <a:srgbClr val="37352F"/>
-                </a:solidFill>
-              </a:rPr>
-              <a:t>¡GLORIA A DIOS POR SIEMPRE,</a:t>
-            </a:r>
-            <a:r>
-              <a:rPr b="0" sz="1900">
-                <a:solidFill>
-                  <a:srgbClr val="37352F"/>
-                </a:solidFill>
-              </a:rPr>
-              <a:t>_x000D_</a:t>
-            </a:r>
-          </a:p>
-          <a:p>
-            <a:pPr>
-              <a:lnSpc>
-                <a:spcPct val="105000"/>
-              </a:lnSpc>
-            </a:pPr>
-            <a:r>
-              <a:rPr b="1" sz="1900">
-                <a:solidFill>
-                  <a:srgbClr val="37352F"/>
-                </a:solidFill>
-              </a:rPr>
-              <a:t>GLORIA A TODO EL CIELO!,</a:t>
-            </a:r>
-            <a:r>
-              <a:rPr b="0" sz="1900">
-                <a:solidFill>
-                  <a:srgbClr val="37352F"/>
-                </a:solidFill>
-              </a:rPr>
-              <a:t>_x000D_</a:t>
-            </a:r>
-          </a:p>
-          <a:p>
-            <a:pPr>
-              <a:lnSpc>
-                <a:spcPct val="105000"/>
-              </a:lnSpc>
-            </a:pPr>
-            <a:r>
-              <a:rPr b="1" sz="1900">
-                <a:solidFill>
-                  <a:srgbClr val="37352F"/>
-                </a:solidFill>
-              </a:rPr>
-              <a:t>¡GLORIA PARA NUESTRO DIOS! (Bis)</a:t>
+              <a:spcBef>
+                <a:spcPts val="0"/>
+              </a:spcBef>
+              <a:spcAft>
+                <a:spcPts val="0"/>
+              </a:spcAft>
+            </a:pPr>
+          </a:p>
+          <a:p>
+            <a:pPr>
+              <a:spcBef>
+                <a:spcPts val="0"/>
+              </a:spcBef>
+              <a:spcAft>
+                <a:spcPts val="0"/>
+              </a:spcAft>
+            </a:pPr>
+          </a:p>
+          <a:p>
+            <a:pPr>
+              <a:lnSpc>
+                <a:spcPct val="105000"/>
+              </a:lnSpc>
+            </a:pPr>
+            <a:r>
+              <a:rPr b="0" sz="1900">
+                <a:solidFill>
+                  <a:srgbClr val="37352F"/>
+                </a:solidFill>
+              </a:rPr>
+              <a:t>  Lam</a:t>
+            </a:r>
+          </a:p>
+          <a:p>
+            <a:pPr>
+              <a:lnSpc>
+                <a:spcPct val="105000"/>
+              </a:lnSpc>
+            </a:pPr>
+            <a:r>
+              <a:rPr b="0" sz="1900">
+                <a:solidFill>
+                  <a:srgbClr val="37352F"/>
+                </a:solidFill>
+              </a:rPr>
+              <a:t>  por la tierra y el sol</a:t>
+            </a:r>
+          </a:p>
+          <a:p>
+            <a:pPr>
+              <a:spcBef>
+                <a:spcPts val="0"/>
+              </a:spcBef>
+              <a:spcAft>
+                <a:spcPts val="0"/>
+              </a:spcAft>
+            </a:pPr>
+          </a:p>
+          <a:p>
+            <a:pPr>
+              <a:spcBef>
+                <a:spcPts val="0"/>
+              </a:spcBef>
+              <a:spcAft>
+                <a:spcPts val="0"/>
+              </a:spcAft>
+            </a:pPr>
+          </a:p>
+          <a:p>
+            <a:pPr>
+              <a:spcBef>
+                <a:spcPts val="0"/>
+              </a:spcBef>
+              <a:spcAft>
+                <a:spcPts val="0"/>
+              </a:spcAft>
+            </a:pPr>
+          </a:p>
+          <a:p>
+            <a:pPr>
+              <a:lnSpc>
+                <a:spcPct val="105000"/>
+              </a:lnSpc>
+            </a:pPr>
+            <a:r>
+              <a:rPr b="0" sz="1900">
+                <a:solidFill>
+                  <a:srgbClr val="37352F"/>
+                </a:solidFill>
+              </a:rPr>
+              <a:t>  Fa                Sol</a:t>
+            </a:r>
+          </a:p>
+          <a:p>
+            <a:pPr>
+              <a:lnSpc>
+                <a:spcPct val="105000"/>
+              </a:lnSpc>
+            </a:pPr>
+            <a:r>
+              <a:rPr b="0" sz="1900">
+                <a:solidFill>
+                  <a:srgbClr val="37352F"/>
+                </a:solidFill>
+              </a:rPr>
+              <a:t>  por la luna y las estrellas;</a:t>
+            </a:r>
+          </a:p>
+          <a:p>
+            <a:pPr>
+              <a:spcBef>
+                <a:spcPts val="0"/>
+              </a:spcBef>
+              <a:spcAft>
+                <a:spcPts val="0"/>
+              </a:spcAft>
+            </a:pPr>
+          </a:p>
+          <a:p>
+            <a:pPr>
+              <a:spcBef>
+                <a:spcPts val="0"/>
+              </a:spcBef>
+              <a:spcAft>
+                <a:spcPts val="0"/>
+              </a:spcAft>
+            </a:pPr>
+          </a:p>
+          <a:p>
+            <a:pPr>
+              <a:spcBef>
+                <a:spcPts val="0"/>
+              </a:spcBef>
+              <a:spcAft>
+                <a:spcPts val="0"/>
+              </a:spcAft>
+            </a:pPr>
+          </a:p>
+          <a:p>
+            <a:pPr>
+              <a:lnSpc>
+                <a:spcPct val="105000"/>
+              </a:lnSpc>
+            </a:pPr>
+            <a:r>
+              <a:rPr b="0" sz="1900">
+                <a:solidFill>
+                  <a:srgbClr val="37352F"/>
+                </a:solidFill>
+              </a:rPr>
+              <a:t>  Do</a:t>
+            </a:r>
+          </a:p>
+          <a:p>
+            <a:pPr>
+              <a:lnSpc>
+                <a:spcPct val="105000"/>
+              </a:lnSpc>
+            </a:pPr>
+            <a:r>
+              <a:rPr b="0" sz="1900">
+                <a:solidFill>
+                  <a:srgbClr val="37352F"/>
+                </a:solidFill>
+              </a:rPr>
+              <a:t>  bendecimos tu nombre</a:t>
+            </a:r>
+          </a:p>
+          <a:p>
+            <a:pPr>
+              <a:spcBef>
+                <a:spcPts val="0"/>
+              </a:spcBef>
+              <a:spcAft>
+                <a:spcPts val="0"/>
+              </a:spcAft>
+            </a:pPr>
+          </a:p>
+          <a:p>
+            <a:pPr>
+              <a:spcBef>
+                <a:spcPts val="0"/>
+              </a:spcBef>
+              <a:spcAft>
+                <a:spcPts val="0"/>
+              </a:spcAft>
+            </a:pPr>
+          </a:p>
+          <a:p>
+            <a:pPr>
+              <a:spcBef>
+                <a:spcPts val="0"/>
+              </a:spcBef>
+              <a:spcAft>
+                <a:spcPts val="0"/>
+              </a:spcAft>
+            </a:pPr>
+          </a:p>
+          <a:p>
+            <a:pPr>
+              <a:lnSpc>
+                <a:spcPct val="105000"/>
+              </a:lnSpc>
+            </a:pPr>
+            <a:r>
+              <a:rPr b="0" sz="1900">
+                <a:solidFill>
+                  <a:srgbClr val="37352F"/>
+                </a:solidFill>
+              </a:rPr>
+              <a:t>    Lam</a:t>
+            </a:r>
+          </a:p>
+          <a:p>
+            <a:pPr>
+              <a:lnSpc>
+                <a:spcPct val="105000"/>
+              </a:lnSpc>
+            </a:pPr>
+            <a:r>
+              <a:rPr b="0" sz="1900">
+                <a:solidFill>
+                  <a:srgbClr val="37352F"/>
+                </a:solidFill>
+              </a:rPr>
+              <a:t>  alzando las manos,</a:t>
+            </a:r>
+          </a:p>
+          <a:p>
+            <a:pPr>
+              <a:spcBef>
+                <a:spcPts val="0"/>
+              </a:spcBef>
+              <a:spcAft>
+                <a:spcPts val="0"/>
+              </a:spcAft>
+            </a:pPr>
+          </a:p>
+          <a:p>
+            <a:pPr>
+              <a:spcBef>
+                <a:spcPts val="0"/>
+              </a:spcBef>
+              <a:spcAft>
+                <a:spcPts val="0"/>
+              </a:spcAft>
+            </a:pPr>
+          </a:p>
+          <a:p>
+            <a:pPr>
+              <a:spcBef>
+                <a:spcPts val="0"/>
+              </a:spcBef>
+              <a:spcAft>
+                <a:spcPts val="0"/>
+              </a:spcAft>
+            </a:pPr>
+          </a:p>
+          <a:p>
+            <a:pPr>
+              <a:lnSpc>
+                <a:spcPct val="105000"/>
+              </a:lnSpc>
+            </a:pPr>
+            <a:r>
+              <a:rPr b="0" sz="1900">
+                <a:solidFill>
+                  <a:srgbClr val="37352F"/>
+                </a:solidFill>
+              </a:rPr>
+              <a:t>    Fa                Sol</a:t>
+            </a:r>
+          </a:p>
+          <a:p>
+            <a:pPr>
+              <a:lnSpc>
+                <a:spcPct val="105000"/>
+              </a:lnSpc>
+            </a:pPr>
+            <a:r>
+              <a:rPr b="0" sz="1900">
+                <a:solidFill>
+                  <a:srgbClr val="37352F"/>
+                </a:solidFill>
+              </a:rPr>
+              <a:t>  cantando para Ti, Señor.</a:t>
+            </a:r>
+          </a:p>
+          <a:p>
+            <a:pPr>
+              <a:spcBef>
+                <a:spcPts val="0"/>
+              </a:spcBef>
+              <a:spcAft>
+                <a:spcPts val="0"/>
+              </a:spcAft>
+            </a:pPr>
+          </a:p>
+          <a:p>
+            <a:pPr>
+              <a:lnSpc>
+                <a:spcPct val="105000"/>
+              </a:lnSpc>
+            </a:pPr>
+            <a:r>
+              <a:rPr b="0" sz="1900">
+                <a:solidFill>
+                  <a:srgbClr val="37352F"/>
+                </a:solidFill>
+              </a:rPr>
+              <a:t>Te damos gracias, Jesús,</a:t>
+            </a:r>
+          </a:p>
+          <a:p>
+            <a:pPr>
+              <a:lnSpc>
+                <a:spcPct val="105000"/>
+              </a:lnSpc>
+            </a:pPr>
+            <a:r>
+              <a:rPr b="0" sz="1900">
+                <a:solidFill>
+                  <a:srgbClr val="37352F"/>
+                </a:solidFill>
+              </a:rPr>
+              <a:t>por el fuego y la luz,</a:t>
+            </a:r>
+          </a:p>
+          <a:p>
+            <a:pPr>
+              <a:lnSpc>
+                <a:spcPct val="105000"/>
+              </a:lnSpc>
+            </a:pPr>
+            <a:r>
+              <a:rPr b="0" sz="1900">
+                <a:solidFill>
+                  <a:srgbClr val="37352F"/>
+                </a:solidFill>
+              </a:rPr>
+              <a:t>por la noche y por el día;</a:t>
+            </a:r>
+          </a:p>
+          <a:p>
+            <a:pPr>
+              <a:lnSpc>
+                <a:spcPct val="105000"/>
+              </a:lnSpc>
+            </a:pPr>
+            <a:r>
+              <a:rPr b="0" sz="1900">
+                <a:solidFill>
+                  <a:srgbClr val="37352F"/>
+                </a:solidFill>
+              </a:rPr>
+              <a:t>bendecimos tu nombre</a:t>
+            </a:r>
+          </a:p>
+          <a:p>
+            <a:pPr>
+              <a:lnSpc>
+                <a:spcPct val="105000"/>
+              </a:lnSpc>
+            </a:pPr>
+            <a:r>
+              <a:rPr b="0" sz="1900">
+                <a:solidFill>
+                  <a:srgbClr val="37352F"/>
+                </a:solidFill>
+              </a:rPr>
+              <a:t>alzando las manos,</a:t>
+            </a:r>
+          </a:p>
+          <a:p>
+            <a:pPr>
+              <a:lnSpc>
+                <a:spcPct val="105000"/>
+              </a:lnSpc>
+            </a:pPr>
+            <a:r>
+              <a:rPr b="0" sz="1900">
+                <a:solidFill>
+                  <a:srgbClr val="37352F"/>
+                </a:solidFill>
+              </a:rPr>
+              <a:t>cantando para Ti, Señor.</a:t>
+            </a:r>
+          </a:p>
+          <a:p>
+            <a:pPr>
+              <a:spcBef>
+                <a:spcPts val="0"/>
+              </a:spcBef>
+              <a:spcAft>
+                <a:spcPts val="0"/>
+              </a:spcAft>
+            </a:pPr>
+          </a:p>
+          <a:p>
+            <a:pPr>
+              <a:spcBef>
+                <a:spcPts val="0"/>
+              </a:spcBef>
+              <a:spcAft>
+                <a:spcPts val="0"/>
+              </a:spcAft>
+            </a:pPr>
+          </a:p>
+          <a:p>
+            <a:pPr>
+              <a:lnSpc>
+                <a:spcPct val="105000"/>
+              </a:lnSpc>
+            </a:pPr>
+            <a:r>
+              <a:rPr b="0" sz="1900">
+                <a:solidFill>
+                  <a:srgbClr val="37352F"/>
+                </a:solidFill>
+              </a:rPr>
+              <a:t>    Do</a:t>
+            </a:r>
+          </a:p>
+          <a:p>
+            <a:pPr>
+              <a:lnSpc>
+                <a:spcPct val="105000"/>
+              </a:lnSpc>
+            </a:pPr>
+            <a:r>
+              <a:rPr b="0" sz="1900">
+                <a:solidFill>
+                  <a:srgbClr val="37352F"/>
+                </a:solidFill>
+              </a:rPr>
+              <a:t>  ¡GLORIA A DIOS!</a:t>
+            </a:r>
+          </a:p>
+          <a:p>
+            <a:pPr>
+              <a:spcBef>
+                <a:spcPts val="0"/>
+              </a:spcBef>
+              <a:spcAft>
+                <a:spcPts val="0"/>
+              </a:spcAft>
+            </a:pPr>
+          </a:p>
+          <a:p>
+            <a:pPr>
+              <a:lnSpc>
+                <a:spcPct val="105000"/>
+              </a:lnSpc>
+            </a:pPr>
+            <a:r>
+              <a:rPr b="0" sz="1900">
+                <a:solidFill>
+                  <a:srgbClr val="37352F"/>
+                </a:solidFill>
+              </a:rPr>
+              <a:t>(A él sea el poder),</a:t>
+            </a:r>
+          </a:p>
+          <a:p>
+            <a:pPr>
+              <a:spcBef>
+                <a:spcPts val="0"/>
+              </a:spcBef>
+              <a:spcAft>
+                <a:spcPts val="0"/>
+              </a:spcAft>
+            </a:pPr>
+          </a:p>
+          <a:p>
+            <a:pPr>
+              <a:spcBef>
+                <a:spcPts val="0"/>
+              </a:spcBef>
+              <a:spcAft>
+                <a:spcPts val="0"/>
+              </a:spcAft>
+            </a:pPr>
+          </a:p>
+          <a:p>
+            <a:pPr>
+              <a:lnSpc>
+                <a:spcPct val="105000"/>
+              </a:lnSpc>
+            </a:pPr>
+            <a:r>
+              <a:rPr b="0" sz="1900">
+                <a:solidFill>
+                  <a:srgbClr val="37352F"/>
+                </a:solidFill>
+              </a:rPr>
+              <a:t>           Lam</a:t>
+            </a:r>
+          </a:p>
+          <a:p>
+            <a:pPr>
+              <a:lnSpc>
+                <a:spcPct val="105000"/>
+              </a:lnSpc>
+            </a:pPr>
+            <a:r>
+              <a:rPr b="0" sz="1900">
+                <a:solidFill>
+                  <a:srgbClr val="37352F"/>
+                </a:solidFill>
+              </a:rPr>
+              <a:t>  ¡GLORIA A DIOS!</a:t>
+            </a:r>
+          </a:p>
+          <a:p>
+            <a:pPr>
+              <a:spcBef>
+                <a:spcPts val="0"/>
+              </a:spcBef>
+              <a:spcAft>
+                <a:spcPts val="0"/>
+              </a:spcAft>
+            </a:pPr>
+          </a:p>
+          <a:p>
+            <a:pPr>
+              <a:lnSpc>
+                <a:spcPct val="105000"/>
+              </a:lnSpc>
+            </a:pPr>
+            <a:r>
+              <a:rPr b="0" sz="1900">
+                <a:solidFill>
+                  <a:srgbClr val="37352F"/>
+                </a:solidFill>
+              </a:rPr>
+              <a:t>(A él sea el honor).</a:t>
+            </a:r>
+          </a:p>
+          <a:p>
+            <a:pPr>
+              <a:spcBef>
+                <a:spcPts val="0"/>
+              </a:spcBef>
+              <a:spcAft>
+                <a:spcPts val="0"/>
+              </a:spcAft>
+            </a:pPr>
+          </a:p>
+          <a:p>
+            <a:pPr>
+              <a:spcBef>
+                <a:spcPts val="0"/>
+              </a:spcBef>
+              <a:spcAft>
+                <a:spcPts val="0"/>
+              </a:spcAft>
+            </a:pPr>
+          </a:p>
+          <a:p>
+            <a:pPr>
+              <a:lnSpc>
+                <a:spcPct val="105000"/>
+              </a:lnSpc>
+            </a:pPr>
+            <a:r>
+              <a:rPr b="0" sz="1900">
+                <a:solidFill>
+                  <a:srgbClr val="37352F"/>
+                </a:solidFill>
+              </a:rPr>
+              <a:t>   Fa</a:t>
+            </a:r>
+          </a:p>
+          <a:p>
+            <a:pPr>
+              <a:lnSpc>
+                <a:spcPct val="105000"/>
+              </a:lnSpc>
+            </a:pPr>
+            <a:r>
+              <a:rPr b="0" sz="1900">
+                <a:solidFill>
+                  <a:srgbClr val="37352F"/>
+                </a:solidFill>
+              </a:rPr>
+              <a:t>  ¡GLORIA A DIOS POR SIEMPRE,</a:t>
+            </a:r>
+          </a:p>
+          <a:p>
+            <a:pPr>
+              <a:spcBef>
+                <a:spcPts val="0"/>
+              </a:spcBef>
+              <a:spcAft>
+                <a:spcPts val="0"/>
+              </a:spcAft>
+            </a:pPr>
+          </a:p>
+          <a:p>
+            <a:pPr>
+              <a:spcBef>
+                <a:spcPts val="0"/>
+              </a:spcBef>
+              <a:spcAft>
+                <a:spcPts val="0"/>
+              </a:spcAft>
+            </a:pPr>
+          </a:p>
+          <a:p>
+            <a:pPr>
+              <a:lnSpc>
+                <a:spcPct val="105000"/>
+              </a:lnSpc>
+            </a:pPr>
+            <a:r>
+              <a:rPr b="0" sz="1900">
+                <a:solidFill>
+                  <a:srgbClr val="37352F"/>
+                </a:solidFill>
+              </a:rPr>
+              <a:t>  Rem</a:t>
+            </a:r>
+          </a:p>
+          <a:p>
+            <a:pPr>
+              <a:lnSpc>
+                <a:spcPct val="105000"/>
+              </a:lnSpc>
+            </a:pPr>
+            <a:r>
+              <a:rPr b="0" sz="1900">
+                <a:solidFill>
+                  <a:srgbClr val="37352F"/>
+                </a:solidFill>
+              </a:rPr>
+              <a:t>  GLORIA A TODO EL CIELO!,</a:t>
+            </a:r>
+          </a:p>
+          <a:p>
+            <a:pPr>
+              <a:spcBef>
+                <a:spcPts val="0"/>
+              </a:spcBef>
+              <a:spcAft>
+                <a:spcPts val="0"/>
+              </a:spcAft>
+            </a:pPr>
+          </a:p>
+          <a:p>
+            <a:pPr>
+              <a:spcBef>
+                <a:spcPts val="0"/>
+              </a:spcBef>
+              <a:spcAft>
+                <a:spcPts val="0"/>
+              </a:spcAft>
+            </a:pPr>
+          </a:p>
+          <a:p>
+            <a:pPr>
+              <a:lnSpc>
+                <a:spcPct val="105000"/>
+              </a:lnSpc>
+            </a:pPr>
+            <a:r>
+              <a:rPr b="0" sz="1900">
+                <a:solidFill>
+                  <a:srgbClr val="37352F"/>
+                </a:solidFill>
+              </a:rPr>
+              <a:t>   Sol</a:t>
+            </a:r>
+          </a:p>
+          <a:p>
+            <a:pPr>
+              <a:lnSpc>
+                <a:spcPct val="105000"/>
+              </a:lnSpc>
+            </a:pPr>
+            <a:r>
+              <a:rPr b="0" sz="1900">
+                <a:solidFill>
+                  <a:srgbClr val="37352F"/>
+                </a:solidFill>
+              </a:rPr>
+              <a:t>  ¡GLORIA PARA NUESTRO DIOS! (Bis)</a:t>
+            </a:r>
+          </a:p>
+          <a:p>
+            <a:pPr>
+              <a:spcBef>
+                <a:spcPts val="0"/>
+              </a:spcBef>
+              <a:spcAft>
+                <a:spcPts val="0"/>
+              </a:spcAft>
+            </a:pPr>
+          </a:p>
+          <a:p>
+            <a:pPr>
+              <a:lnSpc>
+                <a:spcPct val="105000"/>
+              </a:lnSpc>
+            </a:pPr>
+            <a:r>
+              <a:rPr b="0" sz="1900">
+                <a:solidFill>
+                  <a:srgbClr val="37352F"/>
+                </a:solidFill>
+              </a:rPr>
+              <a:t>Te damos gracias, Señor,</a:t>
+            </a:r>
+          </a:p>
+          <a:p>
+            <a:pPr>
+              <a:lnSpc>
+                <a:spcPct val="105000"/>
+              </a:lnSpc>
+            </a:pPr>
+            <a:r>
+              <a:rPr b="0" sz="1900">
+                <a:solidFill>
+                  <a:srgbClr val="37352F"/>
+                </a:solidFill>
+              </a:rPr>
+              <a:t>por los campos en flor,</a:t>
+            </a:r>
+          </a:p>
+          <a:p>
+            <a:pPr>
+              <a:lnSpc>
+                <a:spcPct val="105000"/>
+              </a:lnSpc>
+            </a:pPr>
+            <a:r>
+              <a:rPr b="0" sz="1900">
+                <a:solidFill>
+                  <a:srgbClr val="37352F"/>
+                </a:solidFill>
+              </a:rPr>
+              <a:t>por la nieve de los montes;</a:t>
+            </a:r>
+          </a:p>
+          <a:p>
+            <a:pPr>
+              <a:lnSpc>
+                <a:spcPct val="105000"/>
+              </a:lnSpc>
+            </a:pPr>
+            <a:r>
+              <a:rPr b="0" sz="1900">
+                <a:solidFill>
+                  <a:srgbClr val="37352F"/>
+                </a:solidFill>
+              </a:rPr>
+              <a:t>bendecimos tu nombre</a:t>
+            </a:r>
+          </a:p>
+          <a:p>
+            <a:pPr>
+              <a:lnSpc>
+                <a:spcPct val="105000"/>
+              </a:lnSpc>
+            </a:pPr>
+            <a:r>
+              <a:rPr b="0" sz="1900">
+                <a:solidFill>
+                  <a:srgbClr val="37352F"/>
+                </a:solidFill>
+              </a:rPr>
+              <a:t>alzando las manos,</a:t>
+            </a:r>
+          </a:p>
+          <a:p>
+            <a:pPr>
+              <a:lnSpc>
+                <a:spcPct val="105000"/>
+              </a:lnSpc>
+            </a:pPr>
+            <a:r>
+              <a:rPr b="0" sz="1900">
+                <a:solidFill>
+                  <a:srgbClr val="37352F"/>
+                </a:solidFill>
+              </a:rPr>
+              <a:t>cantando para Ti, Señor.</a:t>
+            </a:r>
+          </a:p>
+          <a:p>
+            <a:pPr>
+              <a:lnSpc>
+                <a:spcPct val="105000"/>
+              </a:lnSpc>
+            </a:pPr>
+            <a:r>
+              <a:rPr b="0" sz="1900">
+                <a:solidFill>
+                  <a:srgbClr val="37352F"/>
+                </a:solidFill>
+              </a:rPr>
+              <a:t>Te damos gracias, Jesús,</a:t>
+            </a:r>
+          </a:p>
+          <a:p>
+            <a:pPr>
+              <a:lnSpc>
+                <a:spcPct val="105000"/>
+              </a:lnSpc>
+            </a:pPr>
+            <a:r>
+              <a:rPr b="0" sz="1900">
+                <a:solidFill>
+                  <a:srgbClr val="37352F"/>
+                </a:solidFill>
+              </a:rPr>
+              <a:t>por las olas del mar,</a:t>
+            </a:r>
+          </a:p>
+          <a:p>
+            <a:pPr>
+              <a:lnSpc>
+                <a:spcPct val="105000"/>
+              </a:lnSpc>
+            </a:pPr>
+            <a:r>
+              <a:rPr b="0" sz="1900">
+                <a:solidFill>
+                  <a:srgbClr val="37352F"/>
+                </a:solidFill>
+              </a:rPr>
+              <a:t>por el canto de las aves;</a:t>
+            </a:r>
+          </a:p>
+          <a:p>
+            <a:pPr>
+              <a:lnSpc>
+                <a:spcPct val="105000"/>
+              </a:lnSpc>
+            </a:pPr>
+            <a:r>
+              <a:rPr b="0" sz="1900">
+                <a:solidFill>
+                  <a:srgbClr val="37352F"/>
+                </a:solidFill>
+              </a:rPr>
+              <a:t>bendecimos tu nombre</a:t>
+            </a:r>
+          </a:p>
+          <a:p>
+            <a:pPr>
+              <a:lnSpc>
+                <a:spcPct val="105000"/>
+              </a:lnSpc>
+            </a:pPr>
+            <a:r>
+              <a:rPr b="0" sz="1900">
+                <a:solidFill>
+                  <a:srgbClr val="37352F"/>
+                </a:solidFill>
+              </a:rPr>
+              <a:t>alzando las manos,</a:t>
+            </a:r>
+          </a:p>
+          <a:p>
+            <a:pPr>
+              <a:lnSpc>
+                <a:spcPct val="105000"/>
+              </a:lnSpc>
+            </a:pPr>
+            <a:r>
+              <a:rPr b="0" sz="1900">
+                <a:solidFill>
+                  <a:srgbClr val="37352F"/>
+                </a:solidFill>
+              </a:rPr>
+              <a:t>cantando para Ti, Señor.</a:t>
             </a:r>
           </a:p>
         </p:txBody>
@@ -12243,7 +14434,7 @@
       </p:pic>
       <p:pic>
         <p:nvPicPr>
-          <p:cNvPr id="4" name="Picture 3" descr="fano_20140421_jesús_es_la_estrella_fiesta_de_la_sagrada_familia_27_diciemb.jpg"/>
+          <p:cNvPr id="4" name="Picture 3" descr="fano_25_domingo_vina.jpg"/>
           <p:cNvPicPr>
             <a:picLocks noChangeAspect="1"/>
           </p:cNvPicPr>
@@ -12258,7 +14449,7 @@
         <p:spPr>
           <a:xfrm>
             <a:off x="6675120" y="1005840"/>
-            <a:ext cx="1533347" cy="2560320"/>
+            <a:ext cx="2337572" cy="2560320"/>
           </a:xfrm>
           <a:prstGeom prst="rect">
             <a:avLst/>
@@ -12381,7 +14572,7 @@
                   <a:srgbClr val="7C3AED"/>
                 </a:solidFill>
               </a:rPr>
-              <a:t>GLORIA A DIOS (2/2)</a:t>
+              <a:t>PRIMERA LECTURA</a:t>
             </a:r>
           </a:p>
           <a:p>
@@ -12395,93 +14586,13 @@
             </a:pPr>
           </a:p>
           <a:p>
-            <a:pPr>
-              <a:lnSpc>
-                <a:spcPct val="105000"/>
-              </a:lnSpc>
-            </a:pPr>
-            <a:r>
-              <a:rPr b="0" sz="1900">
-                <a:solidFill>
-                  <a:srgbClr val="37352F"/>
-                </a:solidFill>
-              </a:rPr>
-              <a:t>Te damos gracias, Señor,_x000D_</a:t>
-            </a:r>
-          </a:p>
-          <a:p>
-            <a:pPr>
-              <a:lnSpc>
-                <a:spcPct val="105000"/>
-              </a:lnSpc>
-            </a:pPr>
-            <a:r>
-              <a:rPr b="0" sz="1900">
-                <a:solidFill>
-                  <a:srgbClr val="37352F"/>
-                </a:solidFill>
-              </a:rPr>
-              <a:t>por los campos en flor,_x000D_</a:t>
-            </a:r>
-          </a:p>
-          <a:p>
-            <a:pPr>
-              <a:lnSpc>
-                <a:spcPct val="105000"/>
-              </a:lnSpc>
-            </a:pPr>
-            <a:r>
-              <a:rPr b="0" sz="1900">
-                <a:solidFill>
-                  <a:srgbClr val="37352F"/>
-                </a:solidFill>
-              </a:rPr>
-              <a:t>por la nieve de los montes;_x000D_</a:t>
-            </a:r>
-          </a:p>
-          <a:p>
-            <a:pPr>
-              <a:lnSpc>
-                <a:spcPct val="105000"/>
-              </a:lnSpc>
-            </a:pPr>
-            <a:r>
-              <a:rPr b="0" sz="1900">
-                <a:solidFill>
-                  <a:srgbClr val="37352F"/>
-                </a:solidFill>
-              </a:rPr>
-              <a:t>bendecimos tu nombre_x000D_</a:t>
-            </a:r>
-          </a:p>
-          <a:p>
-            <a:pPr>
-              <a:lnSpc>
-                <a:spcPct val="105000"/>
-              </a:lnSpc>
-            </a:pPr>
-            <a:r>
-              <a:rPr b="0" sz="1900">
-                <a:solidFill>
-                  <a:srgbClr val="37352F"/>
-                </a:solidFill>
-              </a:rPr>
-              <a:t>alzando las manos,_x000D_</a:t>
-            </a:r>
-          </a:p>
-          <a:p>
-            <a:pPr>
-              <a:lnSpc>
-                <a:spcPct val="105000"/>
-              </a:lnSpc>
-            </a:pPr>
-            <a:r>
-              <a:rPr b="0" sz="1900">
-                <a:solidFill>
-                  <a:srgbClr val="37352F"/>
-                </a:solidFill>
-              </a:rPr>
-              <a:t>cantando para Ti, Señor._x000D_</a:t>
+            <a:r>
+              <a:rPr b="1" sz="1500">
+                <a:solidFill>
+                  <a:srgbClr val="D4A76A"/>
+                </a:solidFill>
+              </a:rPr>
+              <a:t>Is 25,6-10a</a:t>
             </a:r>
           </a:p>
           <a:p>
@@ -12497,238 +14608,16 @@
           <a:p>
             <a:pPr>
               <a:lnSpc>
-                <a:spcPct val="105000"/>
-              </a:lnSpc>
-            </a:pPr>
-            <a:r>
-              <a:rPr b="0" sz="1900">
-                <a:solidFill>
-                  <a:srgbClr val="37352F"/>
-                </a:solidFill>
-              </a:rPr>
-              <a:t>Te damos gracias, Jesús,_x000D_</a:t>
-            </a:r>
-          </a:p>
-          <a:p>
-            <a:pPr>
-              <a:lnSpc>
-                <a:spcPct val="105000"/>
-              </a:lnSpc>
-            </a:pPr>
-            <a:r>
-              <a:rPr b="0" sz="1900">
-                <a:solidFill>
-                  <a:srgbClr val="37352F"/>
-                </a:solidFill>
-              </a:rPr>
-              <a:t>por las olas del mar,_x000D_</a:t>
-            </a:r>
-          </a:p>
-          <a:p>
-            <a:pPr>
-              <a:lnSpc>
-                <a:spcPct val="105000"/>
-              </a:lnSpc>
-            </a:pPr>
-            <a:r>
-              <a:rPr b="0" sz="1900">
-                <a:solidFill>
-                  <a:srgbClr val="37352F"/>
-                </a:solidFill>
-              </a:rPr>
-              <a:t>por el canto de las aves;_x000D_</a:t>
-            </a:r>
-          </a:p>
-          <a:p>
-            <a:pPr>
-              <a:lnSpc>
-                <a:spcPct val="105000"/>
-              </a:lnSpc>
-            </a:pPr>
-            <a:r>
-              <a:rPr b="0" sz="1900">
-                <a:solidFill>
-                  <a:srgbClr val="37352F"/>
-                </a:solidFill>
-              </a:rPr>
-              <a:t>bendecimos tu nombre_x000D_</a:t>
-            </a:r>
-          </a:p>
-          <a:p>
-            <a:pPr>
-              <a:lnSpc>
-                <a:spcPct val="105000"/>
-              </a:lnSpc>
-            </a:pPr>
-            <a:r>
-              <a:rPr b="0" sz="1900">
-                <a:solidFill>
-                  <a:srgbClr val="37352F"/>
-                </a:solidFill>
-              </a:rPr>
-              <a:t>alzando las manos,_x000D_</a:t>
-            </a:r>
-          </a:p>
-          <a:p>
-            <a:pPr>
-              <a:lnSpc>
-                <a:spcPct val="105000"/>
-              </a:lnSpc>
-            </a:pPr>
-            <a:r>
-              <a:rPr b="0" sz="1900">
-                <a:solidFill>
-                  <a:srgbClr val="37352F"/>
-                </a:solidFill>
-              </a:rPr>
-              <a:t>cantando para Ti, Señor._x000D_</a:t>
-            </a:r>
-          </a:p>
-          <a:p>
-            <a:pPr>
-              <a:spcBef>
-                <a:spcPts val="0"/>
-              </a:spcBef>
-              <a:spcAft>
-                <a:spcPts val="0"/>
-              </a:spcAft>
-            </a:pPr>
-          </a:p>
-          <a:p>
-            <a:pPr>
-              <a:lnSpc>
-                <a:spcPct val="105000"/>
-              </a:lnSpc>
-            </a:pPr>
-            <a:r>
-              <a:rPr b="1" sz="1900">
-                <a:solidFill>
-                  <a:srgbClr val="37352F"/>
-                </a:solidFill>
-              </a:rPr>
-              <a:t>¡GLORIA A DIOS!</a:t>
-            </a:r>
-            <a:r>
-              <a:rPr b="0" sz="1900">
-                <a:solidFill>
-                  <a:srgbClr val="37352F"/>
-                </a:solidFill>
-              </a:rPr>
-              <a:t>_x000D_</a:t>
-            </a:r>
-          </a:p>
-          <a:p>
-            <a:pPr>
-              <a:lnSpc>
-                <a:spcPct val="105000"/>
-              </a:lnSpc>
-            </a:pPr>
-            <a:r>
-              <a:rPr b="0" sz="1900">
-                <a:solidFill>
-                  <a:srgbClr val="37352F"/>
-                </a:solidFill>
-              </a:rPr>
-              <a:t>(A él sea el poder),_x000D_</a:t>
-            </a:r>
-          </a:p>
-          <a:p>
-            <a:pPr>
-              <a:lnSpc>
-                <a:spcPct val="105000"/>
-              </a:lnSpc>
-            </a:pPr>
-            <a:r>
-              <a:rPr b="1" sz="1900">
-                <a:solidFill>
-                  <a:srgbClr val="37352F"/>
-                </a:solidFill>
-              </a:rPr>
-              <a:t>¡GLORIA A DIOS!</a:t>
-            </a:r>
-            <a:r>
-              <a:rPr b="0" sz="1900">
-                <a:solidFill>
-                  <a:srgbClr val="37352F"/>
-                </a:solidFill>
-              </a:rPr>
-              <a:t>_x000D_</a:t>
-            </a:r>
-          </a:p>
-          <a:p>
-            <a:pPr>
-              <a:lnSpc>
-                <a:spcPct val="105000"/>
-              </a:lnSpc>
-            </a:pPr>
-            <a:r>
-              <a:rPr b="0" sz="1900">
-                <a:solidFill>
-                  <a:srgbClr val="37352F"/>
-                </a:solidFill>
-              </a:rPr>
-              <a:t> él sea el honor)._x000D_</a:t>
-            </a:r>
-          </a:p>
-          <a:p>
-            <a:pPr>
-              <a:lnSpc>
-                <a:spcPct val="105000"/>
-              </a:lnSpc>
-            </a:pPr>
-            <a:r>
-              <a:rPr b="1" sz="1900">
-                <a:solidFill>
-                  <a:srgbClr val="37352F"/>
-                </a:solidFill>
-              </a:rPr>
-              <a:t>¡GLORIA A DIOS POR SIEMPRE,</a:t>
-            </a:r>
-            <a:r>
-              <a:rPr b="0" sz="1900">
-                <a:solidFill>
-                  <a:srgbClr val="37352F"/>
-                </a:solidFill>
-              </a:rPr>
-              <a:t>_x000D_</a:t>
-            </a:r>
-          </a:p>
-          <a:p>
-            <a:pPr>
-              <a:lnSpc>
-                <a:spcPct val="105000"/>
-              </a:lnSpc>
-            </a:pPr>
-            <a:r>
-              <a:rPr b="1" sz="1900">
-                <a:solidFill>
-                  <a:srgbClr val="37352F"/>
-                </a:solidFill>
-              </a:rPr>
-              <a:t>GLORIA A TODO EL CIELO!,</a:t>
-            </a:r>
-            <a:r>
-              <a:rPr b="0" sz="1900">
-                <a:solidFill>
-                  <a:srgbClr val="37352F"/>
-                </a:solidFill>
-              </a:rPr>
-              <a:t>_x000D_</a:t>
-            </a:r>
-          </a:p>
-          <a:p>
-            <a:pPr>
-              <a:lnSpc>
-                <a:spcPct val="105000"/>
-              </a:lnSpc>
-            </a:pPr>
-            <a:r>
-              <a:rPr b="1" sz="1900">
-                <a:solidFill>
-                  <a:srgbClr val="37352F"/>
-                </a:solidFill>
-              </a:rPr>
-              <a:t>¡GLORIA PARA NUESTRO DIOS! (Bis)</a:t>
+                <a:spcPct val="115000"/>
+              </a:lnSpc>
+            </a:pPr>
+            <a:r>
+              <a:rPr b="0" sz="2000">
+                <a:solidFill>
+                  <a:srgbClr val="37352F"/>
+                </a:solidFill>
+              </a:rPr>
+              <a:t>Aquel día, el Señor de los ejércitos preparará para todos los pueblos, en este monte, un festín de manjares suculentos, un festín de vinos de solera; manjares enjundiosos, vinos generosos. Y arrancará en este monte el velo que cubre a todos los pueblos, el paño que tapa a todas las naciones. Aniquilará la muerte para siempre. El Señor Dios enjugará las lágrimas de todos los rostros, y el oprobio de su pueblo lo alejará de todo el país. Lo ha dicho el Señor. Aquel día se dirá: «Aquí está nuestro Dios, de quien esperábamos que nos salvara; celebremos y gocemos con su salvación. La mano del Señor se posará sobre este monte.»</a:t>
             </a:r>
           </a:p>
         </p:txBody>
@@ -12828,7 +14717,7 @@
       </p:pic>
       <p:pic>
         <p:nvPicPr>
-          <p:cNvPr id="4" name="Picture 3" descr="fano_25_domingo_vina.jpg"/>
+          <p:cNvPr id="4" name="Picture 3" descr="fano_20140360_recibimos_para_hacer_crecer.jpg"/>
           <p:cNvPicPr>
             <a:picLocks noChangeAspect="1"/>
           </p:cNvPicPr>
@@ -12843,7 +14732,7 @@
         <p:spPr>
           <a:xfrm>
             <a:off x="6675120" y="1005840"/>
-            <a:ext cx="2337572" cy="2560320"/>
+            <a:ext cx="4281472" cy="2560320"/>
           </a:xfrm>
           <a:prstGeom prst="rect">
             <a:avLst/>
@@ -12966,7 +14855,7 @@
                   <a:srgbClr val="7C3AED"/>
                 </a:solidFill>
               </a:rPr>
-              <a:t>PRIMERA LECTURA</a:t>
+              <a:t>SALMO RESPONSORIAL</a:t>
             </a:r>
           </a:p>
           <a:p>
@@ -12986,7 +14875,7 @@
                   <a:srgbClr val="D4A76A"/>
                 </a:solidFill>
               </a:rPr>
-              <a:t>Is 25,6-10a</a:t>
+              <a:t>Sal 22, 1 — Habitaré en la casa del Señor</a:t>
             </a:r>
           </a:p>
           <a:p>
@@ -13011,7 +14900,107 @@
                   <a:srgbClr val="37352F"/>
                 </a:solidFill>
               </a:rPr>
-              <a:t>Aquel día, el Señor de los ejércitos preparará para todos los pueblos, en este monte, un festín de manjares suculentos, un festín de vinos de solera; manjares enjundiosos, vinos generosos. Y arrancará en este monte el velo que cubre a todos los pueblos, el paño que tapa a todas las naciones. Aniquilará la muerte para siempre. El Señor Dios enjugará las lágrimas de todos los rostros, y el oprobio de su pueblo lo alejará de todo el país. Lo ha dicho el Señor. Aquel día se dirá: «Aquí está nuestro Dios, de quien esperábamos que nos salvara; celebremos y gocemos con su salvación. La mano del Señor se posará sobre este monte.»</a:t>
+              <a:t>El Señor es mi pastor, nada me falta: en verdes praderas me hace recostar; me conduce hacia fuentes tranquilas; y repara mis fuerzas.</a:t>
+            </a:r>
+          </a:p>
+          <a:p>
+            <a:pPr>
+              <a:spcBef>
+                <a:spcPts val="0"/>
+              </a:spcBef>
+              <a:spcAft>
+                <a:spcPts val="0"/>
+              </a:spcAft>
+            </a:pPr>
+          </a:p>
+          <a:p>
+            <a:pPr>
+              <a:lnSpc>
+                <a:spcPct val="115000"/>
+              </a:lnSpc>
+            </a:pPr>
+            <a:r>
+              <a:rPr b="0" sz="2000">
+                <a:solidFill>
+                  <a:srgbClr val="37352F"/>
+                </a:solidFill>
+              </a:rPr>
+              <a:t>Me guía por el sendero justo, por el honor de su nombre.</a:t>
+            </a:r>
+          </a:p>
+          <a:p>
+            <a:pPr>
+              <a:spcBef>
+                <a:spcPts val="0"/>
+              </a:spcBef>
+              <a:spcAft>
+                <a:spcPts val="0"/>
+              </a:spcAft>
+            </a:pPr>
+          </a:p>
+          <a:p>
+            <a:pPr>
+              <a:lnSpc>
+                <a:spcPct val="115000"/>
+              </a:lnSpc>
+            </a:pPr>
+            <a:r>
+              <a:rPr b="0" sz="2000">
+                <a:solidFill>
+                  <a:srgbClr val="37352F"/>
+                </a:solidFill>
+              </a:rPr>
+              <a:t>Aunque camine por cañadas oscuras, nada temo, porque tú vas conmigo: tu vara y tu cayado me sosiegan.</a:t>
+            </a:r>
+          </a:p>
+          <a:p>
+            <a:pPr>
+              <a:spcBef>
+                <a:spcPts val="0"/>
+              </a:spcBef>
+              <a:spcAft>
+                <a:spcPts val="0"/>
+              </a:spcAft>
+            </a:pPr>
+          </a:p>
+          <a:p>
+            <a:pPr>
+              <a:lnSpc>
+                <a:spcPct val="115000"/>
+              </a:lnSpc>
+            </a:pPr>
+            <a:r>
+              <a:rPr b="0" sz="2000">
+                <a:solidFill>
+                  <a:srgbClr val="37352F"/>
+                </a:solidFill>
+              </a:rPr>
+              <a:t>Preparas una mesa ante mí, enfrente de mis enemigos; me unges la cabeza con perfume, y mi copa rebosa.</a:t>
+            </a:r>
+          </a:p>
+          <a:p>
+            <a:pPr>
+              <a:spcBef>
+                <a:spcPts val="0"/>
+              </a:spcBef>
+              <a:spcAft>
+                <a:spcPts val="0"/>
+              </a:spcAft>
+            </a:pPr>
+          </a:p>
+          <a:p>
+            <a:pPr>
+              <a:lnSpc>
+                <a:spcPct val="115000"/>
+              </a:lnSpc>
+            </a:pPr>
+            <a:r>
+              <a:rPr b="0" sz="2000">
+                <a:solidFill>
+                  <a:srgbClr val="37352F"/>
+                </a:solidFill>
+              </a:rPr>
+              <a:t>Tu bondad y tu misericordia me acompañan; todos los días de mi vida, y habitaré en la casa del Señor; por años sin término.</a:t>
             </a:r>
           </a:p>
         </p:txBody>
@@ -13109,33 +15098,9 @@
           </a:prstGeom>
         </p:spPr>
       </p:pic>
-      <p:pic>
-        <p:nvPicPr>
-          <p:cNvPr id="4" name="Picture 3" descr="20140962.jpg"/>
-          <p:cNvPicPr>
-            <a:picLocks noChangeAspect="1"/>
-          </p:cNvPicPr>
-          <p:nvPr/>
-        </p:nvPicPr>
-        <p:blipFill>
-          <a:blip r:embed="rId3"/>
-          <a:stretch>
-            <a:fillRect/>
-          </a:stretch>
-        </p:blipFill>
-        <p:spPr>
-          <a:xfrm>
-            <a:off x="6675120" y="1005840"/>
-            <a:ext cx="3603329" cy="2560320"/>
-          </a:xfrm>
-          <a:prstGeom prst="rect">
-            <a:avLst/>
-          </a:prstGeom>
-        </p:spPr>
-      </p:pic>
-      <p:sp>
-        <p:nvSpPr>
-          <p:cNvPr id="5" name="Rounded Rectangle 4"/>
+      <p:sp>
+        <p:nvSpPr>
+          <p:cNvPr id="4" name="Rounded Rectangle 3"/>
           <p:cNvSpPr/>
           <p:nvPr/>
         </p:nvSpPr>
@@ -13182,7 +15147,7 @@
       </p:sp>
       <p:sp>
         <p:nvSpPr>
-          <p:cNvPr id="6" name="Rectangle 5"/>
+          <p:cNvPr id="5" name="Rectangle 4"/>
           <p:cNvSpPr/>
           <p:nvPr/>
         </p:nvSpPr>
@@ -13225,7 +15190,7 @@
       </p:sp>
       <p:sp>
         <p:nvSpPr>
-          <p:cNvPr id="7" name="TextBox 6"/>
+          <p:cNvPr id="6" name="TextBox 5"/>
           <p:cNvSpPr txBox="1"/>
           <p:nvPr/>
         </p:nvSpPr>
@@ -13249,7 +15214,7 @@
                   <a:srgbClr val="7C3AED"/>
                 </a:solidFill>
               </a:rPr>
-              <a:t>SALMO RESPONSORIAL</a:t>
+              <a:t>SEGUNDA LECTURA</a:t>
             </a:r>
           </a:p>
           <a:p>
@@ -13269,7 +15234,7 @@
                   <a:srgbClr val="D4A76A"/>
                 </a:solidFill>
               </a:rPr>
-              <a:t>Sal 22, 1 — Habitaré en la casa del Señor</a:t>
+              <a:t>Flp 4,12-14.19-20</a:t>
             </a:r>
           </a:p>
           <a:p>
@@ -13294,107 +15259,7 @@
                   <a:srgbClr val="37352F"/>
                 </a:solidFill>
               </a:rPr>
-              <a:t>El Señor es mi pastor, nada me falta: en verdes praderas me hace recostar; me conduce hacia fuentes tranquilas; y repara mis fuerzas.</a:t>
-            </a:r>
-          </a:p>
-          <a:p>
-            <a:pPr>
-              <a:spcBef>
-                <a:spcPts val="0"/>
-              </a:spcBef>
-              <a:spcAft>
-                <a:spcPts val="0"/>
-              </a:spcAft>
-            </a:pPr>
-          </a:p>
-          <a:p>
-            <a:pPr>
-              <a:lnSpc>
-                <a:spcPct val="115000"/>
-              </a:lnSpc>
-            </a:pPr>
-            <a:r>
-              <a:rPr b="0" sz="2000">
-                <a:solidFill>
-                  <a:srgbClr val="37352F"/>
-                </a:solidFill>
-              </a:rPr>
-              <a:t>Me guía por el sendero justo, por el honor de su nombre.</a:t>
-            </a:r>
-          </a:p>
-          <a:p>
-            <a:pPr>
-              <a:spcBef>
-                <a:spcPts val="0"/>
-              </a:spcBef>
-              <a:spcAft>
-                <a:spcPts val="0"/>
-              </a:spcAft>
-            </a:pPr>
-          </a:p>
-          <a:p>
-            <a:pPr>
-              <a:lnSpc>
-                <a:spcPct val="115000"/>
-              </a:lnSpc>
-            </a:pPr>
-            <a:r>
-              <a:rPr b="0" sz="2000">
-                <a:solidFill>
-                  <a:srgbClr val="37352F"/>
-                </a:solidFill>
-              </a:rPr>
-              <a:t>Aunque camine por cañadas oscuras, nada temo, porque tú vas conmigo: tu vara y tu cayado me sosiegan.</a:t>
-            </a:r>
-          </a:p>
-          <a:p>
-            <a:pPr>
-              <a:spcBef>
-                <a:spcPts val="0"/>
-              </a:spcBef>
-              <a:spcAft>
-                <a:spcPts val="0"/>
-              </a:spcAft>
-            </a:pPr>
-          </a:p>
-          <a:p>
-            <a:pPr>
-              <a:lnSpc>
-                <a:spcPct val="115000"/>
-              </a:lnSpc>
-            </a:pPr>
-            <a:r>
-              <a:rPr b="0" sz="2000">
-                <a:solidFill>
-                  <a:srgbClr val="37352F"/>
-                </a:solidFill>
-              </a:rPr>
-              <a:t>Preparas una mesa ante mí, enfrente de mis enemigos; me unges la cabeza con perfume, y mi copa rebosa.</a:t>
-            </a:r>
-          </a:p>
-          <a:p>
-            <a:pPr>
-              <a:spcBef>
-                <a:spcPts val="0"/>
-              </a:spcBef>
-              <a:spcAft>
-                <a:spcPts val="0"/>
-              </a:spcAft>
-            </a:pPr>
-          </a:p>
-          <a:p>
-            <a:pPr>
-              <a:lnSpc>
-                <a:spcPct val="115000"/>
-              </a:lnSpc>
-            </a:pPr>
-            <a:r>
-              <a:rPr b="0" sz="2000">
-                <a:solidFill>
-                  <a:srgbClr val="37352F"/>
-                </a:solidFill>
-              </a:rPr>
-              <a:t>Tu bondad y tu misericordia me acompañan; todos los días de mi vida, y habitaré en la casa del Señor; por años sin término.</a:t>
+              <a:t>Sé vivir en pobreza y abundancia. Estoy entrenado para todo y en todo: la hartura y el hambre, la abundancia y la privación. Todo lo puedo en aquel que me conforta. En todo caso, hicisteis bien en compartir mi tribulación. En pago, mi Dios proveerá a todas vuestras necesidades con magnificencia, conforme a su espléndida riqueza en Cristo Jesús. A Dios, nuestro Padre, la gloria por los siglos de los siglos. Amén.</a:t>
             </a:r>
           </a:p>
         </p:txBody>
